--- a/2.4/1.pptx
+++ b/2.4/1.pptx
@@ -1,9 +1,12 @@
 
 <file path=ppt/presentation.xml><?xml version="1.0" encoding="utf-8"?>
-<p:presentation xmlns:a="http://schemas.openxmlformats.org/drawingml/2006/main" xmlns:r="http://schemas.openxmlformats.org/officeDocument/2006/relationships" xmlns:p="http://schemas.openxmlformats.org/presentationml/2006/main" saveSubsetFonts="true" autoCompressPictures="0" embedTrueTypeFonts="true">
+<p:presentation xmlns:a="http://schemas.openxmlformats.org/drawingml/2006/main" xmlns:r="http://schemas.openxmlformats.org/officeDocument/2006/relationships" xmlns:p="http://schemas.openxmlformats.org/presentationml/2006/main" embedTrueTypeFonts="1" saveSubsetFonts="1" autoCompressPictures="0">
   <p:sldMasterIdLst>
     <p:sldMasterId id="2147483648" r:id="rId1"/>
   </p:sldMasterIdLst>
+  <p:notesMasterIdLst>
+    <p:notesMasterId r:id="rId12"/>
+  </p:notesMasterIdLst>
   <p:sldIdLst>
     <p:sldId id="256" r:id="rId2"/>
     <p:sldId id="257" r:id="rId3"/>
@@ -16,23 +19,20 @@
     <p:sldId id="264" r:id="rId10"/>
     <p:sldId id="265" r:id="rId11"/>
   </p:sldIdLst>
-  <p:notesMasterIdLst>
-    <p:notesMasterId r:id="rId12"/>
-  </p:notesMasterIdLst>
-  <p:sldSz cx="12191695" cy="6858000"/>
-  <p:notesSz cx="6858000" cy="12191695"/>
+  <p:sldSz cx="12192000" cy="6858000"/>
+  <p:notesSz cx="6858000" cy="12192000"/>
   <p:embeddedFontLst>
     <p:embeddedFont>
-      <p:font typeface="Montserrat Bold"/>
-      <p:regular r:id="rId201314"/>
+      <p:font typeface="Montserrat Bold" panose="020B0604020202020204" charset="-52"/>
+      <p:regular r:id="rId13"/>
     </p:embeddedFont>
     <p:embeddedFont>
-      <p:font typeface="Open Sans Bold"/>
-      <p:regular r:id="rId201315"/>
+      <p:font typeface="Open Sans" panose="020B0606030504020204" pitchFamily="34" charset="0"/>
+      <p:regular r:id="rId14"/>
     </p:embeddedFont>
     <p:embeddedFont>
-      <p:font typeface="Open Sans"/>
-      <p:regular r:id="rId201316"/>
+      <p:font typeface="Open Sans Bold" panose="020B0806030504020204" charset="0"/>
+      <p:regular r:id="rId15"/>
     </p:embeddedFont>
   </p:embeddedFontLst>
   <p:defaultTextStyle>
@@ -127,6 +127,11 @@
       </a:defRPr>
     </a:lvl9pPr>
   </p:defaultTextStyle>
+  <p:extLst>
+    <p:ext uri="{EFAFB233-063F-42B5-8137-9DF3F51BA10A}">
+      <p15:sldGuideLst xmlns:p15="http://schemas.microsoft.com/office/powerpoint/2012/main"/>
+    </p:ext>
+  </p:extLst>
 </p:presentation>
 </file>
 
@@ -152,234 +157,10 @@
           <a:chExt cx="0" cy="0"/>
         </a:xfrm>
       </p:grpSpPr>
-      <p:sp>
-        <p:nvSpPr>
-          <p:cNvPr id="2" name="Header Placeholder 1"/>
-          <p:cNvSpPr>
-            <a:spLocks noGrp="1"/>
-          </p:cNvSpPr>
-          <p:nvPr>
-            <p:ph type="hdr" sz="quarter"/>
-          </p:nvPr>
-        </p:nvSpPr>
-        <p:spPr>
-          <a:xfrm>
-            <a:off x="0" y="0"/>
-            <a:ext cx="2971800" cy="458788"/>
-          </a:xfrm>
-          <a:prstGeom prst="rect">
-            <a:avLst/>
-          </a:prstGeom>
-        </p:spPr>
-        <p:txBody>
-          <a:bodyPr vert="horz" lIns="91440" tIns="45720" rIns="91440" bIns="45720" rtlCol="0"/>
-          <a:lstStyle>
-            <a:lvl1pPr algn="l">
-              <a:defRPr sz="1200"/>
-            </a:lvl1pPr>
-          </a:lstStyle>
-          <a:p>
-            <a:endParaRPr lang="en-US"/>
-          </a:p>
-        </p:txBody>
-      </p:sp>
-      <p:sp>
-        <p:nvSpPr>
-          <p:cNvPr id="3" name="Date Placeholder 2"/>
-          <p:cNvSpPr>
-            <a:spLocks noGrp="1"/>
-          </p:cNvSpPr>
-          <p:nvPr>
-            <p:ph type="dt" idx="1"/>
-          </p:nvPr>
-        </p:nvSpPr>
-        <p:spPr>
-          <a:xfrm>
-            <a:off x="3884613" y="0"/>
-            <a:ext cx="2971800" cy="458788"/>
-          </a:xfrm>
-          <a:prstGeom prst="rect">
-            <a:avLst/>
-          </a:prstGeom>
-        </p:spPr>
-        <p:txBody>
-          <a:bodyPr vert="horz" lIns="91440" tIns="45720" rIns="91440" bIns="45720" rtlCol="0"/>
-          <a:lstStyle>
-            <a:lvl1pPr algn="r">
-              <a:defRPr sz="1200"/>
-            </a:lvl1pPr>
-          </a:lstStyle>
-          <a:p>
-            <a:fld id="{5282F153-3F37-0F45-9E97-73ACFA13230C}" type="datetimeFigureOut">
-              <a:rPr lang="en-US"/>
-              <a:t>7/23/19</a:t>
-            </a:fld>
-            <a:endParaRPr lang="en-US"/>
-          </a:p>
-        </p:txBody>
-      </p:sp>
-      <p:sp>
-        <p:nvSpPr>
-          <p:cNvPr id="4" name="Slide Image Placeholder 3"/>
-          <p:cNvSpPr>
-            <a:spLocks noGrp="1" noRot="1" noChangeAspect="1"/>
-          </p:cNvSpPr>
-          <p:nvPr>
-            <p:ph type="sldImg" idx="2"/>
-          </p:nvPr>
-        </p:nvSpPr>
-        <p:spPr>
-          <a:xfrm>
-            <a:off x="685800" y="1143000"/>
-            <a:ext cx="5486400" cy="3086100"/>
-          </a:xfrm>
-          <a:prstGeom prst="rect">
-            <a:avLst/>
-          </a:prstGeom>
-          <a:noFill/>
-          <a:ln w="12700">
-            <a:solidFill>
-              <a:prstClr val="black"/>
-            </a:solidFill>
-          </a:ln>
-        </p:spPr>
-        <p:txBody>
-          <a:bodyPr vert="horz" lIns="91440" tIns="45720" rIns="91440" bIns="45720" rtlCol="0" anchor="ctr"/>
-          <a:lstStyle/>
-          <a:p>
-            <a:endParaRPr lang="en-US"/>
-          </a:p>
-        </p:txBody>
-      </p:sp>
-      <p:sp>
-        <p:nvSpPr>
-          <p:cNvPr id="5" name="Notes Placeholder 4"/>
-          <p:cNvSpPr>
-            <a:spLocks noGrp="1"/>
-          </p:cNvSpPr>
-          <p:nvPr>
-            <p:ph type="body" sz="quarter" idx="3"/>
-          </p:nvPr>
-        </p:nvSpPr>
-        <p:spPr>
-          <a:xfrm>
-            <a:off x="685800" y="4400550"/>
-            <a:ext cx="5486400" cy="3600450"/>
-          </a:xfrm>
-          <a:prstGeom prst="rect">
-            <a:avLst/>
-          </a:prstGeom>
-        </p:spPr>
-        <p:txBody>
-          <a:bodyPr vert="horz" lIns="91440" tIns="45720" rIns="91440" bIns="45720" rtlCol="0"/>
-          <a:lstStyle/>
-          <a:p>
-            <a:pPr lvl="0"/>
-            <a:r>
-              <a:rPr lang="en-US"/>
-              <a:t>Click to edit Master text styles</a:t>
-            </a:r>
-          </a:p>
-          <a:p>
-            <a:pPr lvl="1"/>
-            <a:r>
-              <a:rPr lang="en-US"/>
-              <a:t>Second level</a:t>
-            </a:r>
-          </a:p>
-          <a:p>
-            <a:pPr lvl="2"/>
-            <a:r>
-              <a:rPr lang="en-US"/>
-              <a:t>Third level</a:t>
-            </a:r>
-          </a:p>
-          <a:p>
-            <a:pPr lvl="3"/>
-            <a:r>
-              <a:rPr lang="en-US"/>
-              <a:t>Fourth level</a:t>
-            </a:r>
-          </a:p>
-          <a:p>
-            <a:pPr lvl="4"/>
-            <a:r>
-              <a:rPr lang="en-US"/>
-              <a:t>Fifth level</a:t>
-            </a:r>
-          </a:p>
-        </p:txBody>
-      </p:sp>
-      <p:sp>
-        <p:nvSpPr>
-          <p:cNvPr id="6" name="Footer Placeholder 5"/>
-          <p:cNvSpPr>
-            <a:spLocks noGrp="1"/>
-          </p:cNvSpPr>
-          <p:nvPr>
-            <p:ph type="ftr" sz="quarter" idx="4"/>
-          </p:nvPr>
-        </p:nvSpPr>
-        <p:spPr>
-          <a:xfrm>
-            <a:off x="0" y="8685213"/>
-            <a:ext cx="2971800" cy="458787"/>
-          </a:xfrm>
-          <a:prstGeom prst="rect">
-            <a:avLst/>
-          </a:prstGeom>
-        </p:spPr>
-        <p:txBody>
-          <a:bodyPr vert="horz" lIns="91440" tIns="45720" rIns="91440" bIns="45720" rtlCol="0" anchor="b"/>
-          <a:lstStyle>
-            <a:lvl1pPr algn="l">
-              <a:defRPr sz="1200"/>
-            </a:lvl1pPr>
-          </a:lstStyle>
-          <a:p>
-            <a:endParaRPr lang="en-US"/>
-          </a:p>
-        </p:txBody>
-      </p:sp>
-      <p:sp>
-        <p:nvSpPr>
-          <p:cNvPr id="7" name="Slide Number Placeholder 6"/>
-          <p:cNvSpPr>
-            <a:spLocks noGrp="1"/>
-          </p:cNvSpPr>
-          <p:nvPr>
-            <p:ph type="sldNum" sz="quarter" idx="5"/>
-          </p:nvPr>
-        </p:nvSpPr>
-        <p:spPr>
-          <a:xfrm>
-            <a:off x="3884613" y="8685213"/>
-            <a:ext cx="2971800" cy="458787"/>
-          </a:xfrm>
-          <a:prstGeom prst="rect">
-            <a:avLst/>
-          </a:prstGeom>
-        </p:spPr>
-        <p:txBody>
-          <a:bodyPr vert="horz" lIns="91440" tIns="45720" rIns="91440" bIns="45720" rtlCol="0" anchor="b"/>
-          <a:lstStyle>
-            <a:lvl1pPr algn="r">
-              <a:defRPr sz="1200"/>
-            </a:lvl1pPr>
-          </a:lstStyle>
-          <a:p>
-            <a:fld id="{CE5E9CC1-C706-0F49-92D6-E571CC5EEA8F}" type="slidenum">
-              <a:rPr lang="en-US"/>
-              <a:t>‹#›</a:t>
-            </a:fld>
-            <a:endParaRPr lang="en-US"/>
-          </a:p>
-        </p:txBody>
-      </p:sp>
     </p:spTree>
     <p:extLst>
       <p:ext uri="{BB962C8B-B14F-4D97-AF65-F5344CB8AC3E}">
-        <p14:creationId xmlns:p14="http://schemas.microsoft.com/office/powerpoint/2010/main" val="1024086991"/>
+        <p14:creationId xmlns:p14="http://schemas.microsoft.com/office/powerpoint/2010/main" val="2183334187"/>
       </p:ext>
     </p:extLst>
   </p:cSld>
@@ -523,10 +304,6 @@
           <a:bodyPr/>
           <a:lstStyle/>
           <a:p>
-            <a:r>
-              <a:rPr lang="en-US" dirty="0"/>
-              <a:t/>
-            </a:r>
             <a:endParaRPr lang="en-US" dirty="0"/>
           </a:p>
         </p:txBody>
@@ -611,10 +388,6 @@
           <a:bodyPr/>
           <a:lstStyle/>
           <a:p>
-            <a:r>
-              <a:rPr lang="en-US" dirty="0"/>
-              <a:t/>
-            </a:r>
             <a:endParaRPr lang="en-US" dirty="0"/>
           </a:p>
         </p:txBody>
@@ -699,10 +472,6 @@
           <a:bodyPr/>
           <a:lstStyle/>
           <a:p>
-            <a:r>
-              <a:rPr lang="en-US" dirty="0"/>
-              <a:t/>
-            </a:r>
             <a:endParaRPr lang="en-US" dirty="0"/>
           </a:p>
         </p:txBody>
@@ -787,10 +556,6 @@
           <a:bodyPr/>
           <a:lstStyle/>
           <a:p>
-            <a:r>
-              <a:rPr lang="en-US" dirty="0"/>
-              <a:t/>
-            </a:r>
             <a:endParaRPr lang="en-US" dirty="0"/>
           </a:p>
         </p:txBody>
@@ -875,10 +640,6 @@
           <a:bodyPr/>
           <a:lstStyle/>
           <a:p>
-            <a:r>
-              <a:rPr lang="en-US" dirty="0"/>
-              <a:t/>
-            </a:r>
             <a:endParaRPr lang="en-US" dirty="0"/>
           </a:p>
         </p:txBody>
@@ -963,10 +724,6 @@
           <a:bodyPr/>
           <a:lstStyle/>
           <a:p>
-            <a:r>
-              <a:rPr lang="en-US" dirty="0"/>
-              <a:t/>
-            </a:r>
             <a:endParaRPr lang="en-US" dirty="0"/>
           </a:p>
         </p:txBody>
@@ -1051,10 +808,6 @@
           <a:bodyPr/>
           <a:lstStyle/>
           <a:p>
-            <a:r>
-              <a:rPr lang="en-US" dirty="0"/>
-              <a:t/>
-            </a:r>
             <a:endParaRPr lang="en-US" dirty="0"/>
           </a:p>
         </p:txBody>
@@ -1139,10 +892,6 @@
           <a:bodyPr/>
           <a:lstStyle/>
           <a:p>
-            <a:r>
-              <a:rPr lang="en-US" dirty="0"/>
-              <a:t/>
-            </a:r>
             <a:endParaRPr lang="en-US" dirty="0"/>
           </a:p>
         </p:txBody>
@@ -1227,10 +976,6 @@
           <a:bodyPr/>
           <a:lstStyle/>
           <a:p>
-            <a:r>
-              <a:rPr lang="en-US" dirty="0"/>
-              <a:t/>
-            </a:r>
             <a:endParaRPr lang="en-US" dirty="0"/>
           </a:p>
         </p:txBody>
@@ -1315,10 +1060,6 @@
           <a:bodyPr/>
           <a:lstStyle/>
           <a:p>
-            <a:r>
-              <a:rPr lang="en-US" dirty="0"/>
-              <a:t/>
-            </a:r>
             <a:endParaRPr lang="en-US" dirty="0"/>
           </a:p>
         </p:txBody>
@@ -1397,6 +1138,7 @@
         <a:solidFill>
           <a:srgbClr val="000000"/>
         </a:solidFill>
+        <a:effectLst/>
       </p:bgPr>
     </p:bg>
     <p:spTree>
@@ -1453,32 +1195,6 @@
           <a:ln/>
         </p:spPr>
       </p:sp>
-      <p:pic>
-        <p:nvPicPr>
-          <p:cNvPr id="4" name="Image 0" descr="preencoded.png">
-            <a:hlinkClick r:id="rId2" tooltip=""/>
-          </p:cNvPr>
-          <p:cNvPicPr>
-            <a:picLocks noChangeAspect="1"/>
-          </p:cNvPicPr>
-          <p:nvPr/>
-        </p:nvPicPr>
-        <p:blipFill>
-          <a:blip r:embed="rId1"/>
-          <a:stretch>
-            <a:fillRect/>
-          </a:stretch>
-        </p:blipFill>
-        <p:spPr>
-          <a:xfrm>
-            <a:off x="11076875" y="6558991"/>
-            <a:ext cx="1071843" cy="256032"/>
-          </a:xfrm>
-          <a:prstGeom prst="rect">
-            <a:avLst/>
-          </a:prstGeom>
-        </p:spPr>
-      </p:pic>
     </p:spTree>
   </p:cSld>
   <p:clrMapOvr>
@@ -1490,6 +1206,11 @@
 <file path=ppt/slideMasters/slideMaster1.xml><?xml version="1.0" encoding="utf-8"?>
 <p:sldMaster xmlns:a="http://schemas.openxmlformats.org/drawingml/2006/main" xmlns:r="http://schemas.openxmlformats.org/officeDocument/2006/relationships" xmlns:p="http://schemas.openxmlformats.org/presentationml/2006/main">
   <p:cSld>
+    <p:bg>
+      <p:bgRef idx="1001">
+        <a:schemeClr val="bg1"/>
+      </p:bgRef>
+    </p:bg>
     <p:spTree>
       <p:nvGrpSpPr>
         <p:cNvPr id="1" name=""/>
@@ -1803,7 +1524,7 @@
           <a:bodyPr wrap="none" lIns="0" tIns="0" rIns="0" bIns="0" rtlCol="0" anchor="t"/>
           <a:lstStyle/>
           <a:p>
-            <a:pPr algn="l" indent="0" marL="0">
+            <a:pPr marL="0" indent="0" algn="l">
               <a:lnSpc>
                 <a:spcPct val="104000"/>
               </a:lnSpc>
@@ -1847,7 +1568,7 @@
           </a:bodyPr>
           <a:lstStyle/>
           <a:p>
-            <a:pPr algn="l" indent="0" marL="0">
+            <a:pPr marL="0" indent="0" algn="l">
               <a:lnSpc>
                 <a:spcPct val="133000"/>
               </a:lnSpc>
@@ -1864,12 +1585,6 @@
               </a:rPr>
               <a:t>Тест-дизайн — это систематический подход к определению того, </a:t>
             </a:r>
-            <a:pPr algn="l" indent="0" marL="0">
-              <a:lnSpc>
-                <a:spcPct val="133000"/>
-              </a:lnSpc>
-              <a:buNone/>
-            </a:pPr>
             <a:r>
               <a:rPr lang="en-US" sz="1450" b="1" dirty="0">
                 <a:solidFill>
@@ -1881,12 +1596,6 @@
               </a:rPr>
               <a:t>что проверять</a:t>
             </a:r>
-            <a:pPr algn="l" indent="0" marL="0">
-              <a:lnSpc>
-                <a:spcPct val="133000"/>
-              </a:lnSpc>
-              <a:buNone/>
-            </a:pPr>
             <a:r>
               <a:rPr lang="en-US" sz="1450" dirty="0">
                 <a:solidFill>
@@ -1898,12 +1607,6 @@
               </a:rPr>
               <a:t> и </a:t>
             </a:r>
-            <a:pPr algn="l" indent="0" marL="0">
-              <a:lnSpc>
-                <a:spcPct val="133000"/>
-              </a:lnSpc>
-              <a:buNone/>
-            </a:pPr>
             <a:r>
               <a:rPr lang="en-US" sz="1450" b="1" dirty="0">
                 <a:solidFill>
@@ -1915,12 +1618,6 @@
               </a:rPr>
               <a:t>как это проверять</a:t>
             </a:r>
-            <a:pPr algn="l" indent="0" marL="0">
-              <a:lnSpc>
-                <a:spcPct val="133000"/>
-              </a:lnSpc>
-              <a:buNone/>
-            </a:pPr>
             <a:r>
               <a:rPr lang="en-US" sz="1450" dirty="0">
                 <a:solidFill>
@@ -1979,7 +1676,7 @@
           <a:bodyPr wrap="none" lIns="0" tIns="0" rIns="0" bIns="0" rtlCol="0" anchor="t"/>
           <a:lstStyle/>
           <a:p>
-            <a:pPr algn="l" indent="0" marL="0">
+            <a:pPr marL="0" indent="0" algn="l">
               <a:lnSpc>
                 <a:spcPct val="104000"/>
               </a:lnSpc>
@@ -2023,7 +1720,7 @@
           </a:bodyPr>
           <a:lstStyle/>
           <a:p>
-            <a:pPr algn="l" indent="0" marL="0">
+            <a:pPr marL="0" indent="0" algn="l">
               <a:lnSpc>
                 <a:spcPct val="133000"/>
               </a:lnSpc>
@@ -2065,7 +1762,7 @@
           <a:bodyPr wrap="none" lIns="0" tIns="0" rIns="0" bIns="0" rtlCol="0" anchor="t"/>
           <a:lstStyle/>
           <a:p>
-            <a:pPr algn="l" indent="0" marL="0">
+            <a:pPr marL="0" indent="0" algn="l">
               <a:lnSpc>
                 <a:spcPct val="104000"/>
               </a:lnSpc>
@@ -2109,7 +1806,7 @@
           </a:bodyPr>
           <a:lstStyle/>
           <a:p>
-            <a:pPr algn="l" marL="294640" indent="-294640">
+            <a:pPr marL="294640" indent="-294640" algn="l">
               <a:lnSpc>
                 <a:spcPct val="133000"/>
               </a:lnSpc>
@@ -2130,7 +1827,7 @@
             <a:endParaRPr lang="en-US" sz="1450" dirty="0"/>
           </a:p>
           <a:p>
-            <a:pPr algn="l" marL="294640" indent="-294640">
+            <a:pPr marL="294640" indent="-294640" algn="l">
               <a:lnSpc>
                 <a:spcPct val="133000"/>
               </a:lnSpc>
@@ -2151,7 +1848,7 @@
             <a:endParaRPr lang="en-US" sz="1450" dirty="0"/>
           </a:p>
           <a:p>
-            <a:pPr algn="l" marL="294640" indent="-294640">
+            <a:pPr marL="294640" indent="-294640" algn="l">
               <a:lnSpc>
                 <a:spcPct val="133000"/>
               </a:lnSpc>
@@ -2221,7 +1918,7 @@
           </a:bodyPr>
           <a:lstStyle/>
           <a:p>
-            <a:pPr algn="l" indent="0" marL="0">
+            <a:pPr marL="0" indent="0" algn="l">
               <a:lnSpc>
                 <a:spcPct val="104000"/>
               </a:lnSpc>
@@ -2265,7 +1962,7 @@
           </a:bodyPr>
           <a:lstStyle/>
           <a:p>
-            <a:pPr algn="l" indent="0" marL="0">
+            <a:pPr marL="0" indent="0" algn="l">
               <a:lnSpc>
                 <a:spcPct val="133000"/>
               </a:lnSpc>
@@ -2288,231 +1985,7 @@
       </p:sp>
       <p:pic>
         <p:nvPicPr>
-          <p:cNvPr id="4" name="Image 0" descr="preencoded.png">    </p:cNvPr>
-          <p:cNvPicPr>
-            <a:picLocks noChangeAspect="1"/>
-          </p:cNvPicPr>
-          <p:nvPr/>
-        </p:nvPicPr>
-        <p:blipFill>
-          <a:blip r:embed="rId1"/>
-          <a:stretch>
-            <a:fillRect/>
-          </a:stretch>
-        </p:blipFill>
-        <p:spPr>
-          <a:xfrm>
-            <a:off x="661475" y="2939554"/>
-            <a:ext cx="1117572" cy="690662"/>
-          </a:xfrm>
-          <a:prstGeom prst="rect">
-            <a:avLst/>
-          </a:prstGeom>
-        </p:spPr>
-      </p:pic>
-      <p:sp>
-        <p:nvSpPr>
-          <p:cNvPr id="5" name="Text 2"/>
-          <p:cNvSpPr/>
-          <p:nvPr/>
-        </p:nvSpPr>
-        <p:spPr>
-          <a:xfrm>
-            <a:off x="661475" y="3866455"/>
-            <a:ext cx="2539936" cy="590550"/>
-          </a:xfrm>
-          <a:prstGeom prst="rect">
-            <a:avLst/>
-          </a:prstGeom>
-          <a:noFill/>
-          <a:ln/>
-        </p:spPr>
-        <p:txBody>
-          <a:bodyPr wrap="square" lIns="0" tIns="0" rIns="0" bIns="0" rtlCol="0" anchor="t">
-            <a:normAutofit/>
-          </a:bodyPr>
-          <a:lstStyle/>
-          <a:p>
-            <a:pPr algn="l" indent="0" marL="0">
-              <a:lnSpc>
-                <a:spcPct val="104000"/>
-              </a:lnSpc>
-              <a:buNone/>
-            </a:pPr>
-            <a:r>
-              <a:rPr lang="en-US" sz="1850" b="1" dirty="0">
-                <a:solidFill>
-                  <a:srgbClr val="000000"/>
-                </a:solidFill>
-                <a:latin typeface="Montserrat Bold" pitchFamily="34" charset="0"/>
-                <a:ea typeface="Montserrat Bold" pitchFamily="34" charset="-122"/>
-                <a:cs typeface="Montserrat Bold" pitchFamily="34" charset="-120"/>
-              </a:rPr>
-              <a:t>Граничные значения</a:t>
-            </a:r>
-            <a:endParaRPr lang="en-US" sz="1850" dirty="0"/>
-          </a:p>
-        </p:txBody>
-      </p:sp>
-      <p:sp>
-        <p:nvSpPr>
-          <p:cNvPr id="6" name="Text 3"/>
-          <p:cNvSpPr/>
-          <p:nvPr/>
-        </p:nvSpPr>
-        <p:spPr>
-          <a:xfrm>
-            <a:off x="661475" y="4570413"/>
-            <a:ext cx="2539936" cy="907256"/>
-          </a:xfrm>
-          <a:prstGeom prst="rect">
-            <a:avLst/>
-          </a:prstGeom>
-          <a:noFill/>
-          <a:ln/>
-        </p:spPr>
-        <p:txBody>
-          <a:bodyPr wrap="square" lIns="0" tIns="0" rIns="0" bIns="0" rtlCol="0" anchor="t">
-            <a:normAutofit/>
-          </a:bodyPr>
-          <a:lstStyle/>
-          <a:p>
-            <a:pPr algn="l" indent="0" marL="0">
-              <a:lnSpc>
-                <a:spcPct val="133000"/>
-              </a:lnSpc>
-              <a:buNone/>
-            </a:pPr>
-            <a:r>
-              <a:rPr lang="en-US" sz="1450" dirty="0">
-                <a:solidFill>
-                  <a:srgbClr val="000000"/>
-                </a:solidFill>
-                <a:latin typeface="Open Sans" pitchFamily="34" charset="0"/>
-                <a:ea typeface="Open Sans" pitchFamily="34" charset="-122"/>
-                <a:cs typeface="Open Sans" pitchFamily="34" charset="-120"/>
-              </a:rPr>
-              <a:t>Для диапазонов чисел — проверяем значения на границах и рядом с ними</a:t>
-            </a:r>
-            <a:endParaRPr lang="en-US" sz="1450" dirty="0"/>
-          </a:p>
-        </p:txBody>
-      </p:sp>
-      <p:pic>
-        <p:nvPicPr>
-          <p:cNvPr id="7" name="Image 1" descr="preencoded.png">    </p:cNvPr>
-          <p:cNvPicPr>
-            <a:picLocks noChangeAspect="1"/>
-          </p:cNvPicPr>
-          <p:nvPr/>
-        </p:nvPicPr>
-        <p:blipFill>
-          <a:blip r:embed="rId2"/>
-          <a:stretch>
-            <a:fillRect/>
-          </a:stretch>
-        </p:blipFill>
-        <p:spPr>
-          <a:xfrm>
-            <a:off x="3437645" y="2939554"/>
-            <a:ext cx="1117572" cy="690662"/>
-          </a:xfrm>
-          <a:prstGeom prst="rect">
-            <a:avLst/>
-          </a:prstGeom>
-        </p:spPr>
-      </p:pic>
-      <p:sp>
-        <p:nvSpPr>
-          <p:cNvPr id="8" name="Text 4"/>
-          <p:cNvSpPr/>
-          <p:nvPr/>
-        </p:nvSpPr>
-        <p:spPr>
-          <a:xfrm>
-            <a:off x="3437645" y="3866455"/>
-            <a:ext cx="2540036" cy="590550"/>
-          </a:xfrm>
-          <a:prstGeom prst="rect">
-            <a:avLst/>
-          </a:prstGeom>
-          <a:noFill/>
-          <a:ln/>
-        </p:spPr>
-        <p:txBody>
-          <a:bodyPr wrap="square" lIns="0" tIns="0" rIns="0" bIns="0" rtlCol="0" anchor="t">
-            <a:normAutofit/>
-          </a:bodyPr>
-          <a:lstStyle/>
-          <a:p>
-            <a:pPr algn="l" indent="0" marL="0">
-              <a:lnSpc>
-                <a:spcPct val="104000"/>
-              </a:lnSpc>
-              <a:buNone/>
-            </a:pPr>
-            <a:r>
-              <a:rPr lang="en-US" sz="1850" b="1" dirty="0">
-                <a:solidFill>
-                  <a:srgbClr val="000000"/>
-                </a:solidFill>
-                <a:latin typeface="Montserrat Bold" pitchFamily="34" charset="0"/>
-                <a:ea typeface="Montserrat Bold" pitchFamily="34" charset="-122"/>
-                <a:cs typeface="Montserrat Bold" pitchFamily="34" charset="-120"/>
-              </a:rPr>
-              <a:t>Попарное тестирование</a:t>
-            </a:r>
-            <a:endParaRPr lang="en-US" sz="1850" dirty="0"/>
-          </a:p>
-        </p:txBody>
-      </p:sp>
-      <p:sp>
-        <p:nvSpPr>
-          <p:cNvPr id="9" name="Text 5"/>
-          <p:cNvSpPr/>
-          <p:nvPr/>
-        </p:nvSpPr>
-        <p:spPr>
-          <a:xfrm>
-            <a:off x="3437645" y="4570413"/>
-            <a:ext cx="2540036" cy="907256"/>
-          </a:xfrm>
-          <a:prstGeom prst="rect">
-            <a:avLst/>
-          </a:prstGeom>
-          <a:noFill/>
-          <a:ln/>
-        </p:spPr>
-        <p:txBody>
-          <a:bodyPr wrap="square" lIns="0" tIns="0" rIns="0" bIns="0" rtlCol="0" anchor="t">
-            <a:normAutofit/>
-          </a:bodyPr>
-          <a:lstStyle/>
-          <a:p>
-            <a:pPr algn="l" indent="0" marL="0">
-              <a:lnSpc>
-                <a:spcPct val="133000"/>
-              </a:lnSpc>
-              <a:buNone/>
-            </a:pPr>
-            <a:r>
-              <a:rPr lang="en-US" sz="1450" dirty="0">
-                <a:solidFill>
-                  <a:srgbClr val="000000"/>
-                </a:solidFill>
-                <a:latin typeface="Open Sans" pitchFamily="34" charset="0"/>
-                <a:ea typeface="Open Sans" pitchFamily="34" charset="-122"/>
-                <a:cs typeface="Open Sans" pitchFamily="34" charset="-120"/>
-              </a:rPr>
-              <a:t>Для множества параметров — покрываем все пары комбинаций</a:t>
-            </a:r>
-            <a:endParaRPr lang="en-US" sz="1450" dirty="0"/>
-          </a:p>
-        </p:txBody>
-      </p:sp>
-      <p:pic>
-        <p:nvPicPr>
-          <p:cNvPr id="10" name="Image 2" descr="preencoded.png">    </p:cNvPr>
+          <p:cNvPr id="4" name="Image 0" descr="preencoded.png"/>
           <p:cNvPicPr>
             <a:picLocks noChangeAspect="1"/>
           </p:cNvPicPr>
@@ -2526,7 +1999,7 @@
         </p:blipFill>
         <p:spPr>
           <a:xfrm>
-            <a:off x="6213915" y="2939554"/>
+            <a:off x="661475" y="2939554"/>
             <a:ext cx="1117572" cy="690662"/>
           </a:xfrm>
           <a:prstGeom prst="rect">
@@ -2536,26 +2009,28 @@
       </p:pic>
       <p:sp>
         <p:nvSpPr>
-          <p:cNvPr id="11" name="Text 6"/>
-          <p:cNvSpPr/>
-          <p:nvPr/>
-        </p:nvSpPr>
-        <p:spPr>
-          <a:xfrm>
-            <a:off x="6213915" y="3866455"/>
-            <a:ext cx="2540036" cy="295275"/>
-          </a:xfrm>
-          <a:prstGeom prst="rect">
-            <a:avLst/>
-          </a:prstGeom>
-          <a:noFill/>
-          <a:ln/>
-        </p:spPr>
-        <p:txBody>
-          <a:bodyPr wrap="none" lIns="0" tIns="0" rIns="0" bIns="0" rtlCol="0" anchor="t"/>
-          <a:lstStyle/>
-          <a:p>
-            <a:pPr algn="l" indent="0" marL="0">
+          <p:cNvPr id="5" name="Text 2"/>
+          <p:cNvSpPr/>
+          <p:nvPr/>
+        </p:nvSpPr>
+        <p:spPr>
+          <a:xfrm>
+            <a:off x="661475" y="3866455"/>
+            <a:ext cx="2539936" cy="590550"/>
+          </a:xfrm>
+          <a:prstGeom prst="rect">
+            <a:avLst/>
+          </a:prstGeom>
+          <a:noFill/>
+          <a:ln/>
+        </p:spPr>
+        <p:txBody>
+          <a:bodyPr wrap="square" lIns="0" tIns="0" rIns="0" bIns="0" rtlCol="0" anchor="t">
+            <a:normAutofit/>
+          </a:bodyPr>
+          <a:lstStyle/>
+          <a:p>
+            <a:pPr marL="0" indent="0" algn="l">
               <a:lnSpc>
                 <a:spcPct val="104000"/>
               </a:lnSpc>
@@ -2570,7 +2045,7 @@
                 <a:ea typeface="Montserrat Bold" pitchFamily="34" charset="-122"/>
                 <a:cs typeface="Montserrat Bold" pitchFamily="34" charset="-120"/>
               </a:rPr>
-              <a:t>Таблицы решений</a:t>
+              <a:t>Граничные значения</a:t>
             </a:r>
             <a:endParaRPr lang="en-US" sz="1850" dirty="0"/>
           </a:p>
@@ -2578,14 +2053,14 @@
       </p:sp>
       <p:sp>
         <p:nvSpPr>
-          <p:cNvPr id="12" name="Text 7"/>
-          <p:cNvSpPr/>
-          <p:nvPr/>
-        </p:nvSpPr>
-        <p:spPr>
-          <a:xfrm>
-            <a:off x="6213915" y="4275138"/>
-            <a:ext cx="2540036" cy="907256"/>
+          <p:cNvPr id="6" name="Text 3"/>
+          <p:cNvSpPr/>
+          <p:nvPr/>
+        </p:nvSpPr>
+        <p:spPr>
+          <a:xfrm>
+            <a:off x="661475" y="4570413"/>
+            <a:ext cx="2539936" cy="907256"/>
           </a:xfrm>
           <a:prstGeom prst="rect">
             <a:avLst/>
@@ -2599,7 +2074,7 @@
           </a:bodyPr>
           <a:lstStyle/>
           <a:p>
-            <a:pPr algn="l" indent="0" marL="0">
+            <a:pPr marL="0" indent="0" algn="l">
               <a:lnSpc>
                 <a:spcPct val="133000"/>
               </a:lnSpc>
@@ -2614,7 +2089,7 @@
                 <a:ea typeface="Open Sans" pitchFamily="34" charset="-122"/>
                 <a:cs typeface="Open Sans" pitchFamily="34" charset="-120"/>
               </a:rPr>
-              <a:t>Для сложных правил — систематизируем условия и действия</a:t>
+              <a:t>Для диапазонов чисел — проверяем значения на границах и рядом с ними</a:t>
             </a:r>
             <a:endParaRPr lang="en-US" sz="1450" dirty="0"/>
           </a:p>
@@ -2622,7 +2097,7 @@
       </p:sp>
       <p:pic>
         <p:nvPicPr>
-          <p:cNvPr id="13" name="Image 3" descr="preencoded.png">    </p:cNvPr>
+          <p:cNvPr id="7" name="Image 1" descr="preencoded.png"/>
           <p:cNvPicPr>
             <a:picLocks noChangeAspect="1"/>
           </p:cNvPicPr>
@@ -2636,7 +2111,7 @@
         </p:blipFill>
         <p:spPr>
           <a:xfrm>
-            <a:off x="8990184" y="2939554"/>
+            <a:off x="3437645" y="2939554"/>
             <a:ext cx="1117572" cy="690662"/>
           </a:xfrm>
           <a:prstGeom prst="rect">
@@ -2646,13 +2121,13 @@
       </p:pic>
       <p:sp>
         <p:nvSpPr>
-          <p:cNvPr id="14" name="Text 8"/>
-          <p:cNvSpPr/>
-          <p:nvPr/>
-        </p:nvSpPr>
-        <p:spPr>
-          <a:xfrm>
-            <a:off x="8990184" y="3866455"/>
+          <p:cNvPr id="8" name="Text 4"/>
+          <p:cNvSpPr/>
+          <p:nvPr/>
+        </p:nvSpPr>
+        <p:spPr>
+          <a:xfrm>
+            <a:off x="3437645" y="3866455"/>
             <a:ext cx="2540036" cy="590550"/>
           </a:xfrm>
           <a:prstGeom prst="rect">
@@ -2667,7 +2142,7 @@
           </a:bodyPr>
           <a:lstStyle/>
           <a:p>
-            <a:pPr algn="l" indent="0" marL="0">
+            <a:pPr marL="0" indent="0" algn="l">
               <a:lnSpc>
                 <a:spcPct val="104000"/>
               </a:lnSpc>
@@ -2682,7 +2157,7 @@
                 <a:ea typeface="Montserrat Bold" pitchFamily="34" charset="-122"/>
                 <a:cs typeface="Montserrat Bold" pitchFamily="34" charset="-120"/>
               </a:rPr>
-              <a:t>Переходы состояний</a:t>
+              <a:t>Попарное тестирование</a:t>
             </a:r>
             <a:endParaRPr lang="en-US" sz="1850" dirty="0"/>
           </a:p>
@@ -2690,13 +2165,13 @@
       </p:sp>
       <p:sp>
         <p:nvSpPr>
-          <p:cNvPr id="15" name="Text 9"/>
-          <p:cNvSpPr/>
-          <p:nvPr/>
-        </p:nvSpPr>
-        <p:spPr>
-          <a:xfrm>
-            <a:off x="8990184" y="4570413"/>
+          <p:cNvPr id="9" name="Text 5"/>
+          <p:cNvSpPr/>
+          <p:nvPr/>
+        </p:nvSpPr>
+        <p:spPr>
+          <a:xfrm>
+            <a:off x="3437645" y="4570413"/>
             <a:ext cx="2540036" cy="907256"/>
           </a:xfrm>
           <a:prstGeom prst="rect">
@@ -2711,7 +2186,7 @@
           </a:bodyPr>
           <a:lstStyle/>
           <a:p>
-            <a:pPr algn="l" indent="0" marL="0">
+            <a:pPr marL="0" indent="0" algn="l">
               <a:lnSpc>
                 <a:spcPct val="133000"/>
               </a:lnSpc>
@@ -2726,22 +2201,88 @@
                 <a:ea typeface="Open Sans" pitchFamily="34" charset="-122"/>
                 <a:cs typeface="Open Sans" pitchFamily="34" charset="-120"/>
               </a:rPr>
-              <a:t>Для систем с состоянием — проверяем переходы между режимами</a:t>
+              <a:t>Для множества параметров — покрываем все пары комбинаций</a:t>
             </a:r>
             <a:endParaRPr lang="en-US" sz="1450" dirty="0"/>
           </a:p>
         </p:txBody>
       </p:sp>
-      <p:sp>
-        <p:nvSpPr>
-          <p:cNvPr id="16" name="Text 10"/>
-          <p:cNvSpPr/>
-          <p:nvPr/>
-        </p:nvSpPr>
-        <p:spPr>
-          <a:xfrm>
-            <a:off x="661475" y="5690295"/>
-            <a:ext cx="10868745" cy="604838"/>
+      <p:pic>
+        <p:nvPicPr>
+          <p:cNvPr id="10" name="Image 2" descr="preencoded.png"/>
+          <p:cNvPicPr>
+            <a:picLocks noChangeAspect="1"/>
+          </p:cNvPicPr>
+          <p:nvPr/>
+        </p:nvPicPr>
+        <p:blipFill>
+          <a:blip r:embed="rId5"/>
+          <a:stretch>
+            <a:fillRect/>
+          </a:stretch>
+        </p:blipFill>
+        <p:spPr>
+          <a:xfrm>
+            <a:off x="6213915" y="2939554"/>
+            <a:ext cx="1117572" cy="690662"/>
+          </a:xfrm>
+          <a:prstGeom prst="rect">
+            <a:avLst/>
+          </a:prstGeom>
+        </p:spPr>
+      </p:pic>
+      <p:sp>
+        <p:nvSpPr>
+          <p:cNvPr id="11" name="Text 6"/>
+          <p:cNvSpPr/>
+          <p:nvPr/>
+        </p:nvSpPr>
+        <p:spPr>
+          <a:xfrm>
+            <a:off x="6213915" y="3866455"/>
+            <a:ext cx="2540036" cy="295275"/>
+          </a:xfrm>
+          <a:prstGeom prst="rect">
+            <a:avLst/>
+          </a:prstGeom>
+          <a:noFill/>
+          <a:ln/>
+        </p:spPr>
+        <p:txBody>
+          <a:bodyPr wrap="none" lIns="0" tIns="0" rIns="0" bIns="0" rtlCol="0" anchor="t"/>
+          <a:lstStyle/>
+          <a:p>
+            <a:pPr marL="0" indent="0" algn="l">
+              <a:lnSpc>
+                <a:spcPct val="104000"/>
+              </a:lnSpc>
+              <a:buNone/>
+            </a:pPr>
+            <a:r>
+              <a:rPr lang="en-US" sz="1850" b="1" dirty="0">
+                <a:solidFill>
+                  <a:srgbClr val="000000"/>
+                </a:solidFill>
+                <a:latin typeface="Montserrat Bold" pitchFamily="34" charset="0"/>
+                <a:ea typeface="Montserrat Bold" pitchFamily="34" charset="-122"/>
+                <a:cs typeface="Montserrat Bold" pitchFamily="34" charset="-120"/>
+              </a:rPr>
+              <a:t>Таблицы решений</a:t>
+            </a:r>
+            <a:endParaRPr lang="en-US" sz="1850" dirty="0"/>
+          </a:p>
+        </p:txBody>
+      </p:sp>
+      <p:sp>
+        <p:nvSpPr>
+          <p:cNvPr id="12" name="Text 7"/>
+          <p:cNvSpPr/>
+          <p:nvPr/>
+        </p:nvSpPr>
+        <p:spPr>
+          <a:xfrm>
+            <a:off x="6213915" y="4275138"/>
+            <a:ext cx="2540036" cy="907256"/>
           </a:xfrm>
           <a:prstGeom prst="rect">
             <a:avLst/>
@@ -2755,7 +2296,7 @@
           </a:bodyPr>
           <a:lstStyle/>
           <a:p>
-            <a:pPr algn="l" indent="0" marL="0">
+            <a:pPr marL="0" indent="0" algn="l">
               <a:lnSpc>
                 <a:spcPct val="133000"/>
               </a:lnSpc>
@@ -2770,14 +2311,164 @@
                 <a:ea typeface="Open Sans" pitchFamily="34" charset="-122"/>
                 <a:cs typeface="Open Sans" pitchFamily="34" charset="-120"/>
               </a:rPr>
+              <a:t>Для сложных правил — систематизируем условия и действия</a:t>
+            </a:r>
+            <a:endParaRPr lang="en-US" sz="1450" dirty="0"/>
+          </a:p>
+        </p:txBody>
+      </p:sp>
+      <p:pic>
+        <p:nvPicPr>
+          <p:cNvPr id="13" name="Image 3" descr="preencoded.png"/>
+          <p:cNvPicPr>
+            <a:picLocks noChangeAspect="1"/>
+          </p:cNvPicPr>
+          <p:nvPr/>
+        </p:nvPicPr>
+        <p:blipFill>
+          <a:blip r:embed="rId6"/>
+          <a:stretch>
+            <a:fillRect/>
+          </a:stretch>
+        </p:blipFill>
+        <p:spPr>
+          <a:xfrm>
+            <a:off x="8990184" y="2939554"/>
+            <a:ext cx="1117572" cy="690662"/>
+          </a:xfrm>
+          <a:prstGeom prst="rect">
+            <a:avLst/>
+          </a:prstGeom>
+        </p:spPr>
+      </p:pic>
+      <p:sp>
+        <p:nvSpPr>
+          <p:cNvPr id="14" name="Text 8"/>
+          <p:cNvSpPr/>
+          <p:nvPr/>
+        </p:nvSpPr>
+        <p:spPr>
+          <a:xfrm>
+            <a:off x="8990184" y="3866455"/>
+            <a:ext cx="2540036" cy="590550"/>
+          </a:xfrm>
+          <a:prstGeom prst="rect">
+            <a:avLst/>
+          </a:prstGeom>
+          <a:noFill/>
+          <a:ln/>
+        </p:spPr>
+        <p:txBody>
+          <a:bodyPr wrap="square" lIns="0" tIns="0" rIns="0" bIns="0" rtlCol="0" anchor="t">
+            <a:normAutofit/>
+          </a:bodyPr>
+          <a:lstStyle/>
+          <a:p>
+            <a:pPr marL="0" indent="0" algn="l">
+              <a:lnSpc>
+                <a:spcPct val="104000"/>
+              </a:lnSpc>
+              <a:buNone/>
+            </a:pPr>
+            <a:r>
+              <a:rPr lang="en-US" sz="1850" b="1" dirty="0">
+                <a:solidFill>
+                  <a:srgbClr val="000000"/>
+                </a:solidFill>
+                <a:latin typeface="Montserrat Bold" pitchFamily="34" charset="0"/>
+                <a:ea typeface="Montserrat Bold" pitchFamily="34" charset="-122"/>
+                <a:cs typeface="Montserrat Bold" pitchFamily="34" charset="-120"/>
+              </a:rPr>
+              <a:t>Переходы состояний</a:t>
+            </a:r>
+            <a:endParaRPr lang="en-US" sz="1850" dirty="0"/>
+          </a:p>
+        </p:txBody>
+      </p:sp>
+      <p:sp>
+        <p:nvSpPr>
+          <p:cNvPr id="15" name="Text 9"/>
+          <p:cNvSpPr/>
+          <p:nvPr/>
+        </p:nvSpPr>
+        <p:spPr>
+          <a:xfrm>
+            <a:off x="8990184" y="4570413"/>
+            <a:ext cx="2540036" cy="907256"/>
+          </a:xfrm>
+          <a:prstGeom prst="rect">
+            <a:avLst/>
+          </a:prstGeom>
+          <a:noFill/>
+          <a:ln/>
+        </p:spPr>
+        <p:txBody>
+          <a:bodyPr wrap="square" lIns="0" tIns="0" rIns="0" bIns="0" rtlCol="0" anchor="t">
+            <a:normAutofit/>
+          </a:bodyPr>
+          <a:lstStyle/>
+          <a:p>
+            <a:pPr marL="0" indent="0" algn="l">
+              <a:lnSpc>
+                <a:spcPct val="133000"/>
+              </a:lnSpc>
+              <a:buNone/>
+            </a:pPr>
+            <a:r>
+              <a:rPr lang="en-US" sz="1450" dirty="0">
+                <a:solidFill>
+                  <a:srgbClr val="000000"/>
+                </a:solidFill>
+                <a:latin typeface="Open Sans" pitchFamily="34" charset="0"/>
+                <a:ea typeface="Open Sans" pitchFamily="34" charset="-122"/>
+                <a:cs typeface="Open Sans" pitchFamily="34" charset="-120"/>
+              </a:rPr>
+              <a:t>Для систем с состоянием — проверяем переходы между режимами</a:t>
+            </a:r>
+            <a:endParaRPr lang="en-US" sz="1450" dirty="0"/>
+          </a:p>
+        </p:txBody>
+      </p:sp>
+      <p:sp>
+        <p:nvSpPr>
+          <p:cNvPr id="16" name="Text 10"/>
+          <p:cNvSpPr/>
+          <p:nvPr/>
+        </p:nvSpPr>
+        <p:spPr>
+          <a:xfrm>
+            <a:off x="661475" y="5690295"/>
+            <a:ext cx="10868745" cy="604838"/>
+          </a:xfrm>
+          <a:prstGeom prst="rect">
+            <a:avLst/>
+          </a:prstGeom>
+          <a:noFill/>
+          <a:ln/>
+        </p:spPr>
+        <p:txBody>
+          <a:bodyPr wrap="square" lIns="0" tIns="0" rIns="0" bIns="0" rtlCol="0" anchor="t">
+            <a:normAutofit/>
+          </a:bodyPr>
+          <a:lstStyle/>
+          <a:p>
+            <a:pPr marL="0" indent="0" algn="l">
+              <a:lnSpc>
+                <a:spcPct val="133000"/>
+              </a:lnSpc>
+              <a:buNone/>
+            </a:pPr>
+            <a:r>
+              <a:rPr lang="en-US" sz="1450" dirty="0">
+                <a:solidFill>
+                  <a:srgbClr val="000000"/>
+                </a:solidFill>
+                <a:latin typeface="Open Sans" pitchFamily="34" charset="0"/>
+                <a:ea typeface="Open Sans" pitchFamily="34" charset="-122"/>
+                <a:cs typeface="Open Sans" pitchFamily="34" charset="-120"/>
+              </a:rPr>
               <a:t>Все техники основаны на одной идее: </a:t>
             </a:r>
-            <a:pPr algn="l" indent="0" marL="0">
-              <a:lnSpc>
-                <a:spcPct val="133000"/>
-              </a:lnSpc>
-              <a:buNone/>
-            </a:pPr>
             <a:r>
               <a:rPr lang="en-US" sz="1450" b="1" dirty="0">
                 <a:solidFill>
@@ -2839,7 +2530,7 @@
           <a:bodyPr wrap="none" lIns="0" tIns="0" rIns="0" bIns="0" rtlCol="0" anchor="t"/>
           <a:lstStyle/>
           <a:p>
-            <a:pPr algn="l" indent="0" marL="0">
+            <a:pPr marL="0" indent="0" algn="l">
               <a:lnSpc>
                 <a:spcPct val="104000"/>
               </a:lnSpc>
@@ -2883,7 +2574,7 @@
           </a:bodyPr>
           <a:lstStyle/>
           <a:p>
-            <a:pPr algn="l" indent="0" marL="0">
+            <a:pPr marL="0" indent="0" algn="l">
               <a:lnSpc>
                 <a:spcPct val="127000"/>
               </a:lnSpc>
@@ -2953,17 +2644,17 @@
       </p:sp>
       <p:pic>
         <p:nvPicPr>
-          <p:cNvPr id="6" name="Image 0" descr="preencoded.png">    </p:cNvPr>
+          <p:cNvPr id="6" name="Image 0" descr="preencoded.png"/>
           <p:cNvPicPr>
             <a:picLocks noChangeAspect="1"/>
           </p:cNvPicPr>
           <p:nvPr/>
         </p:nvPicPr>
         <p:blipFill>
-          <a:blip r:embed="rId1">
+          <a:blip>
             <a:extLst>
               <a:ext uri="{96DAC541-7B7A-43D3-8B79-37D633B846F1}">
-                <asvg:svgBlip xmlns:asvg="http://schemas.microsoft.com/office/drawing/2016/SVG/main" r:embed="rId2"/>
+                <asvg:svgBlip xmlns:asvg="http://schemas.microsoft.com/office/drawing/2016/SVG/main" r:embed="rId3"/>
               </a:ext>
             </a:extLst>
           </a:blip>
@@ -3002,7 +2693,7 @@
           <a:bodyPr wrap="none" lIns="0" tIns="0" rIns="0" bIns="0" rtlCol="0" anchor="t"/>
           <a:lstStyle/>
           <a:p>
-            <a:pPr algn="l" indent="0" marL="0">
+            <a:pPr marL="0" indent="0" algn="l">
               <a:lnSpc>
                 <a:spcPct val="104000"/>
               </a:lnSpc>
@@ -3044,7 +2735,7 @@
           <a:bodyPr wrap="none" lIns="0" tIns="0" rIns="0" bIns="0" rtlCol="0" anchor="t"/>
           <a:lstStyle/>
           <a:p>
-            <a:pPr algn="l" indent="0" marL="0">
+            <a:pPr marL="0" indent="0" algn="l">
               <a:lnSpc>
                 <a:spcPct val="127000"/>
               </a:lnSpc>
@@ -3114,14 +2805,14 @@
       </p:sp>
       <p:pic>
         <p:nvPicPr>
-          <p:cNvPr id="11" name="Image 1" descr="preencoded.png">    </p:cNvPr>
+          <p:cNvPr id="11" name="Image 1" descr="preencoded.png"/>
           <p:cNvPicPr>
             <a:picLocks noChangeAspect="1"/>
           </p:cNvPicPr>
           <p:nvPr/>
         </p:nvPicPr>
         <p:blipFill>
-          <a:blip r:embed="rId3">
+          <a:blip>
             <a:extLst>
               <a:ext uri="{96DAC541-7B7A-43D3-8B79-37D633B846F1}">
                 <asvg:svgBlip xmlns:asvg="http://schemas.microsoft.com/office/drawing/2016/SVG/main" r:embed="rId4"/>
@@ -3163,7 +2854,7 @@
           <a:bodyPr wrap="none" lIns="0" tIns="0" rIns="0" bIns="0" rtlCol="0" anchor="t"/>
           <a:lstStyle/>
           <a:p>
-            <a:pPr algn="l" indent="0" marL="0">
+            <a:pPr marL="0" indent="0" algn="l">
               <a:lnSpc>
                 <a:spcPct val="104000"/>
               </a:lnSpc>
@@ -3205,7 +2896,7 @@
           <a:bodyPr wrap="none" lIns="0" tIns="0" rIns="0" bIns="0" rtlCol="0" anchor="t"/>
           <a:lstStyle/>
           <a:p>
-            <a:pPr algn="l" indent="0" marL="0">
+            <a:pPr marL="0" indent="0" algn="l">
               <a:lnSpc>
                 <a:spcPct val="127000"/>
               </a:lnSpc>
@@ -3275,14 +2966,175 @@
       </p:sp>
       <p:pic>
         <p:nvPicPr>
-          <p:cNvPr id="16" name="Image 2" descr="preencoded.png">    </p:cNvPr>
+          <p:cNvPr id="16" name="Image 2" descr="preencoded.png"/>
           <p:cNvPicPr>
             <a:picLocks noChangeAspect="1"/>
           </p:cNvPicPr>
           <p:nvPr/>
         </p:nvPicPr>
         <p:blipFill>
-          <a:blip r:embed="rId5">
+          <a:blip>
+            <a:extLst>
+              <a:ext uri="{96DAC541-7B7A-43D3-8B79-37D633B846F1}">
+                <asvg:svgBlip xmlns:asvg="http://schemas.microsoft.com/office/drawing/2016/SVG/main" r:embed="rId5"/>
+              </a:ext>
+            </a:extLst>
+          </a:blip>
+          <a:stretch>
+            <a:fillRect/>
+          </a:stretch>
+        </p:blipFill>
+        <p:spPr>
+          <a:xfrm>
+            <a:off x="978173" y="4182566"/>
+            <a:ext cx="229586" cy="229592"/>
+          </a:xfrm>
+          <a:prstGeom prst="rect">
+            <a:avLst/>
+          </a:prstGeom>
+        </p:spPr>
+      </p:pic>
+      <p:sp>
+        <p:nvSpPr>
+          <p:cNvPr id="17" name="Text 12"/>
+          <p:cNvSpPr/>
+          <p:nvPr/>
+        </p:nvSpPr>
+        <p:spPr>
+          <a:xfrm>
+            <a:off x="837881" y="4705648"/>
+            <a:ext cx="5004965" cy="265708"/>
+          </a:xfrm>
+          <a:prstGeom prst="rect">
+            <a:avLst/>
+          </a:prstGeom>
+          <a:noFill/>
+          <a:ln/>
+        </p:spPr>
+        <p:txBody>
+          <a:bodyPr wrap="none" lIns="0" tIns="0" rIns="0" bIns="0" rtlCol="0" anchor="t"/>
+          <a:lstStyle/>
+          <a:p>
+            <a:pPr marL="0" indent="0" algn="l">
+              <a:lnSpc>
+                <a:spcPct val="104000"/>
+              </a:lnSpc>
+              <a:buNone/>
+            </a:pPr>
+            <a:r>
+              <a:rPr lang="en-US" sz="1650" b="1" dirty="0">
+                <a:solidFill>
+                  <a:srgbClr val="000000"/>
+                </a:solidFill>
+                <a:latin typeface="Montserrat Bold" pitchFamily="34" charset="0"/>
+                <a:ea typeface="Montserrat Bold" pitchFamily="34" charset="-122"/>
+                <a:cs typeface="Montserrat Bold" pitchFamily="34" charset="-120"/>
+              </a:rPr>
+              <a:t>Макеты интерфейса</a:t>
+            </a:r>
+            <a:endParaRPr lang="en-US" sz="1650" dirty="0"/>
+          </a:p>
+        </p:txBody>
+      </p:sp>
+      <p:sp>
+        <p:nvSpPr>
+          <p:cNvPr id="18" name="Text 13"/>
+          <p:cNvSpPr/>
+          <p:nvPr/>
+        </p:nvSpPr>
+        <p:spPr>
+          <a:xfrm>
+            <a:off x="837881" y="5063133"/>
+            <a:ext cx="5004965" cy="258564"/>
+          </a:xfrm>
+          <a:prstGeom prst="rect">
+            <a:avLst/>
+          </a:prstGeom>
+          <a:noFill/>
+          <a:ln/>
+        </p:spPr>
+        <p:txBody>
+          <a:bodyPr wrap="none" lIns="0" tIns="0" rIns="0" bIns="0" rtlCol="0" anchor="t"/>
+          <a:lstStyle/>
+          <a:p>
+            <a:pPr marL="0" indent="0" algn="l">
+              <a:lnSpc>
+                <a:spcPct val="127000"/>
+              </a:lnSpc>
+              <a:buNone/>
+            </a:pPr>
+            <a:r>
+              <a:rPr lang="en-US" sz="1300" dirty="0">
+                <a:solidFill>
+                  <a:srgbClr val="000000"/>
+                </a:solidFill>
+                <a:latin typeface="Open Sans" pitchFamily="34" charset="0"/>
+                <a:ea typeface="Open Sans" pitchFamily="34" charset="-122"/>
+                <a:cs typeface="Open Sans" pitchFamily="34" charset="-120"/>
+              </a:rPr>
+              <a:t>Визуальные прототипы и схемы экранов</a:t>
+            </a:r>
+            <a:endParaRPr lang="en-US" sz="1300" dirty="0"/>
+          </a:p>
+        </p:txBody>
+      </p:sp>
+      <p:sp>
+        <p:nvSpPr>
+          <p:cNvPr id="19" name="Shape 14"/>
+          <p:cNvSpPr/>
+          <p:nvPr/>
+        </p:nvSpPr>
+        <p:spPr>
+          <a:xfrm>
+            <a:off x="6172343" y="3865860"/>
+            <a:ext cx="5357877" cy="1632248"/>
+          </a:xfrm>
+          <a:prstGeom prst="roundRect">
+            <a:avLst>
+              <a:gd name="adj" fmla="val 4377"/>
+            </a:avLst>
+          </a:prstGeom>
+          <a:solidFill>
+            <a:srgbClr val="D5F6F1"/>
+          </a:solidFill>
+          <a:ln w="6350">
+            <a:solidFill>
+              <a:srgbClr val="BBDCD7"/>
+            </a:solidFill>
+            <a:prstDash val="solid"/>
+          </a:ln>
+        </p:spPr>
+      </p:sp>
+      <p:sp>
+        <p:nvSpPr>
+          <p:cNvPr id="20" name="Shape 15"/>
+          <p:cNvSpPr/>
+          <p:nvPr/>
+        </p:nvSpPr>
+        <p:spPr>
+          <a:xfrm>
+            <a:off x="6348750" y="4042271"/>
+            <a:ext cx="510269" cy="510282"/>
+          </a:xfrm>
+          <a:prstGeom prst="ellipse">
+            <a:avLst/>
+          </a:prstGeom>
+          <a:solidFill>
+            <a:srgbClr val="27B29F"/>
+          </a:solidFill>
+          <a:ln/>
+        </p:spPr>
+      </p:sp>
+      <p:pic>
+        <p:nvPicPr>
+          <p:cNvPr id="21" name="Image 3" descr="preencoded.png"/>
+          <p:cNvPicPr>
+            <a:picLocks noChangeAspect="1"/>
+          </p:cNvPicPr>
+          <p:nvPr/>
+        </p:nvPicPr>
+        <p:blipFill>
+          <a:blip>
             <a:extLst>
               <a:ext uri="{96DAC541-7B7A-43D3-8B79-37D633B846F1}">
                 <asvg:svgBlip xmlns:asvg="http://schemas.microsoft.com/office/drawing/2016/SVG/main" r:embed="rId6"/>
@@ -3295,7 +3147,7 @@
         </p:blipFill>
         <p:spPr>
           <a:xfrm>
-            <a:off x="978173" y="4182566"/>
+            <a:off x="6489042" y="4182566"/>
             <a:ext cx="229586" cy="229592"/>
           </a:xfrm>
           <a:prstGeom prst="rect">
@@ -3305,14 +3157,14 @@
       </p:pic>
       <p:sp>
         <p:nvSpPr>
-          <p:cNvPr id="17" name="Text 12"/>
-          <p:cNvSpPr/>
-          <p:nvPr/>
-        </p:nvSpPr>
-        <p:spPr>
-          <a:xfrm>
-            <a:off x="837881" y="4705648"/>
-            <a:ext cx="5004965" cy="265708"/>
+          <p:cNvPr id="22" name="Text 16"/>
+          <p:cNvSpPr/>
+          <p:nvPr/>
+        </p:nvSpPr>
+        <p:spPr>
+          <a:xfrm>
+            <a:off x="6348750" y="4705648"/>
+            <a:ext cx="5005064" cy="265708"/>
           </a:xfrm>
           <a:prstGeom prst="rect">
             <a:avLst/>
@@ -3324,7 +3176,7 @@
           <a:bodyPr wrap="none" lIns="0" tIns="0" rIns="0" bIns="0" rtlCol="0" anchor="t"/>
           <a:lstStyle/>
           <a:p>
-            <a:pPr algn="l" indent="0" marL="0">
+            <a:pPr marL="0" indent="0" algn="l">
               <a:lnSpc>
                 <a:spcPct val="104000"/>
               </a:lnSpc>
@@ -3339,7 +3191,7 @@
                 <a:ea typeface="Montserrat Bold" pitchFamily="34" charset="-122"/>
                 <a:cs typeface="Montserrat Bold" pitchFamily="34" charset="-120"/>
               </a:rPr>
-              <a:t>Макеты интерфейса</a:t>
+              <a:t>Бизнес-правила</a:t>
             </a:r>
             <a:endParaRPr lang="en-US" sz="1650" dirty="0"/>
           </a:p>
@@ -3347,14 +3199,14 @@
       </p:sp>
       <p:sp>
         <p:nvSpPr>
-          <p:cNvPr id="18" name="Text 13"/>
-          <p:cNvSpPr/>
-          <p:nvPr/>
-        </p:nvSpPr>
-        <p:spPr>
-          <a:xfrm>
-            <a:off x="837881" y="5063133"/>
-            <a:ext cx="5004965" cy="258564"/>
+          <p:cNvPr id="23" name="Text 17"/>
+          <p:cNvSpPr/>
+          <p:nvPr/>
+        </p:nvSpPr>
+        <p:spPr>
+          <a:xfrm>
+            <a:off x="6348750" y="5063133"/>
+            <a:ext cx="5005064" cy="258564"/>
           </a:xfrm>
           <a:prstGeom prst="rect">
             <a:avLst/>
@@ -3366,7 +3218,7 @@
           <a:bodyPr wrap="none" lIns="0" tIns="0" rIns="0" bIns="0" rtlCol="0" anchor="t"/>
           <a:lstStyle/>
           <a:p>
-            <a:pPr algn="l" indent="0" marL="0">
+            <a:pPr marL="0" indent="0" algn="l">
               <a:lnSpc>
                 <a:spcPct val="127000"/>
               </a:lnSpc>
@@ -3381,7 +3233,7 @@
                 <a:ea typeface="Open Sans" pitchFamily="34" charset="-122"/>
                 <a:cs typeface="Open Sans" pitchFamily="34" charset="-120"/>
               </a:rPr>
-              <a:t>Визуальные прототипы и схемы экранов</a:t>
+              <a:t>Логика и ограничения, заданные бизнесом</a:t>
             </a:r>
             <a:endParaRPr lang="en-US" sz="1300" dirty="0"/>
           </a:p>
@@ -3389,203 +3241,42 @@
       </p:sp>
       <p:sp>
         <p:nvSpPr>
-          <p:cNvPr id="19" name="Shape 14"/>
-          <p:cNvSpPr/>
-          <p:nvPr/>
-        </p:nvSpPr>
-        <p:spPr>
-          <a:xfrm>
-            <a:off x="6172343" y="3865860"/>
-            <a:ext cx="5357877" cy="1632248"/>
+          <p:cNvPr id="24" name="Shape 18"/>
+          <p:cNvSpPr/>
+          <p:nvPr/>
+        </p:nvSpPr>
+        <p:spPr>
+          <a:xfrm>
+            <a:off x="661475" y="5670352"/>
+            <a:ext cx="10868745" cy="634305"/>
           </a:xfrm>
           <a:prstGeom prst="roundRect">
             <a:avLst>
-              <a:gd name="adj" fmla="val 4377"/>
+              <a:gd name="adj" fmla="val 11264"/>
             </a:avLst>
           </a:prstGeom>
           <a:solidFill>
-            <a:srgbClr val="D5F6F1"/>
-          </a:solidFill>
-          <a:ln w="6350">
-            <a:solidFill>
-              <a:srgbClr val="BBDCD7"/>
-            </a:solidFill>
-            <a:prstDash val="solid"/>
-          </a:ln>
-        </p:spPr>
-      </p:sp>
-      <p:sp>
-        <p:nvSpPr>
-          <p:cNvPr id="20" name="Shape 15"/>
-          <p:cNvSpPr/>
-          <p:nvPr/>
-        </p:nvSpPr>
-        <p:spPr>
-          <a:xfrm>
-            <a:off x="6348750" y="4042271"/>
-            <a:ext cx="510269" cy="510282"/>
-          </a:xfrm>
-          <a:prstGeom prst="ellipse">
-            <a:avLst/>
-          </a:prstGeom>
-          <a:solidFill>
-            <a:srgbClr val="27B29F"/>
+            <a:srgbClr val="FCF2B5"/>
           </a:solidFill>
           <a:ln/>
         </p:spPr>
       </p:sp>
       <p:pic>
         <p:nvPicPr>
-          <p:cNvPr id="21" name="Image 3" descr="preencoded.png">    </p:cNvPr>
+          <p:cNvPr id="25" name="Image 4" descr="preencoded.png"/>
           <p:cNvPicPr>
             <a:picLocks noChangeAspect="1"/>
           </p:cNvPicPr>
           <p:nvPr/>
         </p:nvPicPr>
         <p:blipFill>
-          <a:blip r:embed="rId7">
-            <a:extLst>
-              <a:ext uri="{96DAC541-7B7A-43D3-8B79-37D633B846F1}">
-                <asvg:svgBlip xmlns:asvg="http://schemas.microsoft.com/office/drawing/2016/SVG/main" r:embed="rId8"/>
-              </a:ext>
-            </a:extLst>
-          </a:blip>
+          <a:blip r:embed="rId7"/>
           <a:stretch>
             <a:fillRect/>
           </a:stretch>
         </p:blipFill>
         <p:spPr>
           <a:xfrm>
-            <a:off x="6489042" y="4182566"/>
-            <a:ext cx="229586" cy="229592"/>
-          </a:xfrm>
-          <a:prstGeom prst="rect">
-            <a:avLst/>
-          </a:prstGeom>
-        </p:spPr>
-      </p:pic>
-      <p:sp>
-        <p:nvSpPr>
-          <p:cNvPr id="22" name="Text 16"/>
-          <p:cNvSpPr/>
-          <p:nvPr/>
-        </p:nvSpPr>
-        <p:spPr>
-          <a:xfrm>
-            <a:off x="6348750" y="4705648"/>
-            <a:ext cx="5005064" cy="265708"/>
-          </a:xfrm>
-          <a:prstGeom prst="rect">
-            <a:avLst/>
-          </a:prstGeom>
-          <a:noFill/>
-          <a:ln/>
-        </p:spPr>
-        <p:txBody>
-          <a:bodyPr wrap="none" lIns="0" tIns="0" rIns="0" bIns="0" rtlCol="0" anchor="t"/>
-          <a:lstStyle/>
-          <a:p>
-            <a:pPr algn="l" indent="0" marL="0">
-              <a:lnSpc>
-                <a:spcPct val="104000"/>
-              </a:lnSpc>
-              <a:buNone/>
-            </a:pPr>
-            <a:r>
-              <a:rPr lang="en-US" sz="1650" b="1" dirty="0">
-                <a:solidFill>
-                  <a:srgbClr val="000000"/>
-                </a:solidFill>
-                <a:latin typeface="Montserrat Bold" pitchFamily="34" charset="0"/>
-                <a:ea typeface="Montserrat Bold" pitchFamily="34" charset="-122"/>
-                <a:cs typeface="Montserrat Bold" pitchFamily="34" charset="-120"/>
-              </a:rPr>
-              <a:t>Бизнес-правила</a:t>
-            </a:r>
-            <a:endParaRPr lang="en-US" sz="1650" dirty="0"/>
-          </a:p>
-        </p:txBody>
-      </p:sp>
-      <p:sp>
-        <p:nvSpPr>
-          <p:cNvPr id="23" name="Text 17"/>
-          <p:cNvSpPr/>
-          <p:nvPr/>
-        </p:nvSpPr>
-        <p:spPr>
-          <a:xfrm>
-            <a:off x="6348750" y="5063133"/>
-            <a:ext cx="5005064" cy="258564"/>
-          </a:xfrm>
-          <a:prstGeom prst="rect">
-            <a:avLst/>
-          </a:prstGeom>
-          <a:noFill/>
-          <a:ln/>
-        </p:spPr>
-        <p:txBody>
-          <a:bodyPr wrap="none" lIns="0" tIns="0" rIns="0" bIns="0" rtlCol="0" anchor="t"/>
-          <a:lstStyle/>
-          <a:p>
-            <a:pPr algn="l" indent="0" marL="0">
-              <a:lnSpc>
-                <a:spcPct val="127000"/>
-              </a:lnSpc>
-              <a:buNone/>
-            </a:pPr>
-            <a:r>
-              <a:rPr lang="en-US" sz="1300" dirty="0">
-                <a:solidFill>
-                  <a:srgbClr val="000000"/>
-                </a:solidFill>
-                <a:latin typeface="Open Sans" pitchFamily="34" charset="0"/>
-                <a:ea typeface="Open Sans" pitchFamily="34" charset="-122"/>
-                <a:cs typeface="Open Sans" pitchFamily="34" charset="-120"/>
-              </a:rPr>
-              <a:t>Логика и ограничения, заданные бизнесом</a:t>
-            </a:r>
-            <a:endParaRPr lang="en-US" sz="1300" dirty="0"/>
-          </a:p>
-        </p:txBody>
-      </p:sp>
-      <p:sp>
-        <p:nvSpPr>
-          <p:cNvPr id="24" name="Shape 18"/>
-          <p:cNvSpPr/>
-          <p:nvPr/>
-        </p:nvSpPr>
-        <p:spPr>
-          <a:xfrm>
-            <a:off x="661475" y="5670352"/>
-            <a:ext cx="10868745" cy="634305"/>
-          </a:xfrm>
-          <a:prstGeom prst="roundRect">
-            <a:avLst>
-              <a:gd name="adj" fmla="val 11264"/>
-            </a:avLst>
-          </a:prstGeom>
-          <a:solidFill>
-            <a:srgbClr val="FCF2B5"/>
-          </a:solidFill>
-          <a:ln/>
-        </p:spPr>
-      </p:sp>
-      <p:pic>
-        <p:nvPicPr>
-          <p:cNvPr id="25" name="Image 4" descr="preencoded.png">    </p:cNvPr>
-          <p:cNvPicPr>
-            <a:picLocks noChangeAspect="1"/>
-          </p:cNvPicPr>
-          <p:nvPr/>
-        </p:nvPicPr>
-        <p:blipFill>
-          <a:blip r:embed="rId9"/>
-          <a:stretch>
-            <a:fillRect/>
-          </a:stretch>
-        </p:blipFill>
-        <p:spPr>
-          <a:xfrm>
             <a:off x="831532" y="5888534"/>
             <a:ext cx="212620" cy="170061"/>
           </a:xfrm>
@@ -3615,7 +3306,7 @@
           <a:bodyPr wrap="none" lIns="0" tIns="0" rIns="0" bIns="0" rtlCol="0" anchor="t"/>
           <a:lstStyle/>
           <a:p>
-            <a:pPr algn="l" indent="0" marL="0">
+            <a:pPr marL="0" indent="0" algn="l">
               <a:lnSpc>
                 <a:spcPct val="127000"/>
               </a:lnSpc>
@@ -3683,14 +3374,14 @@
       </p:sp>
       <p:pic>
         <p:nvPicPr>
-          <p:cNvPr id="3" name="Image 0" descr="preencoded.png">    </p:cNvPr>
+          <p:cNvPr id="3" name="Image 0" descr="preencoded.png"/>
           <p:cNvPicPr>
             <a:picLocks noChangeAspect="1"/>
           </p:cNvPicPr>
           <p:nvPr/>
         </p:nvPicPr>
         <p:blipFill>
-          <a:blip r:embed="rId1"/>
+          <a:blip r:embed="rId3"/>
           <a:stretch>
             <a:fillRect/>
           </a:stretch>
@@ -3728,7 +3419,7 @@
           </a:bodyPr>
           <a:lstStyle/>
           <a:p>
-            <a:pPr algn="l" indent="0" marL="0">
+            <a:pPr marL="0" indent="0" algn="l">
               <a:lnSpc>
                 <a:spcPct val="104000"/>
               </a:lnSpc>
@@ -3772,7 +3463,7 @@
           </a:bodyPr>
           <a:lstStyle/>
           <a:p>
-            <a:pPr algn="l" indent="0" marL="0">
+            <a:pPr marL="0" indent="0" algn="l">
               <a:lnSpc>
                 <a:spcPct val="113000"/>
               </a:lnSpc>
@@ -3789,12 +3480,6 @@
               </a:rPr>
               <a:t>Большую функцию нужно разбить на конкретные области проверки. Каждая область — это </a:t>
             </a:r>
-            <a:pPr algn="l" indent="0" marL="0">
-              <a:lnSpc>
-                <a:spcPct val="113000"/>
-              </a:lnSpc>
-              <a:buNone/>
-            </a:pPr>
             <a:r>
               <a:rPr lang="en-US" sz="1000" b="1" dirty="0">
                 <a:solidFill>
@@ -3806,12 +3491,6 @@
               </a:rPr>
               <a:t>тестовое условие</a:t>
             </a:r>
-            <a:pPr algn="l" indent="0" marL="0">
-              <a:lnSpc>
-                <a:spcPct val="113000"/>
-              </a:lnSpc>
-              <a:buNone/>
-            </a:pPr>
             <a:r>
               <a:rPr lang="en-US" sz="1000" dirty="0">
                 <a:solidFill>
@@ -3848,7 +3527,7 @@
           <a:bodyPr wrap="none" lIns="0" tIns="0" rIns="0" bIns="0" rtlCol="0" anchor="t"/>
           <a:lstStyle/>
           <a:p>
-            <a:pPr algn="l" indent="0" marL="0">
+            <a:pPr marL="0" indent="0" algn="l">
               <a:lnSpc>
                 <a:spcPct val="104000"/>
               </a:lnSpc>
@@ -3871,17 +3550,17 @@
       </p:sp>
       <p:pic>
         <p:nvPicPr>
-          <p:cNvPr id="7" name="Image 1" descr="preencoded.png">    </p:cNvPr>
+          <p:cNvPr id="7" name="Image 1" descr="preencoded.png"/>
           <p:cNvPicPr>
             <a:picLocks noChangeAspect="1"/>
           </p:cNvPicPr>
           <p:nvPr/>
         </p:nvPicPr>
         <p:blipFill>
-          <a:blip r:embed="rId2">
+          <a:blip>
             <a:extLst>
               <a:ext uri="{96DAC541-7B7A-43D3-8B79-37D633B846F1}">
-                <asvg:svgBlip xmlns:asvg="http://schemas.microsoft.com/office/drawing/2016/SVG/main" r:embed="rId3"/>
+                <asvg:svgBlip xmlns:asvg="http://schemas.microsoft.com/office/drawing/2016/SVG/main" r:embed="rId4"/>
               </a:ext>
             </a:extLst>
           </a:blip>
@@ -3922,7 +3601,7 @@
           </a:bodyPr>
           <a:lstStyle/>
           <a:p>
-            <a:pPr algn="l" indent="0" marL="0">
+            <a:pPr marL="0" indent="0" algn="l">
               <a:lnSpc>
                 <a:spcPct val="104000"/>
               </a:lnSpc>
@@ -3966,7 +3645,7 @@
           </a:bodyPr>
           <a:lstStyle/>
           <a:p>
-            <a:pPr algn="l" indent="0" marL="0">
+            <a:pPr marL="0" indent="0" algn="l">
               <a:lnSpc>
                 <a:spcPct val="113000"/>
               </a:lnSpc>
@@ -3989,14 +3668,14 @@
       </p:sp>
       <p:pic>
         <p:nvPicPr>
-          <p:cNvPr id="10" name="Image 2" descr="preencoded.png">    </p:cNvPr>
+          <p:cNvPr id="10" name="Image 2" descr="preencoded.png"/>
           <p:cNvPicPr>
             <a:picLocks noChangeAspect="1"/>
           </p:cNvPicPr>
           <p:nvPr/>
         </p:nvPicPr>
         <p:blipFill>
-          <a:blip r:embed="rId4">
+          <a:blip>
             <a:extLst>
               <a:ext uri="{96DAC541-7B7A-43D3-8B79-37D633B846F1}">
                 <asvg:svgBlip xmlns:asvg="http://schemas.microsoft.com/office/drawing/2016/SVG/main" r:embed="rId5"/>
@@ -4038,7 +3717,7 @@
           <a:bodyPr wrap="none" lIns="0" tIns="0" rIns="0" bIns="0" rtlCol="0" anchor="t"/>
           <a:lstStyle/>
           <a:p>
-            <a:pPr algn="l" indent="0" marL="0">
+            <a:pPr marL="0" indent="0" algn="l">
               <a:lnSpc>
                 <a:spcPct val="104000"/>
               </a:lnSpc>
@@ -4082,7 +3761,7 @@
           </a:bodyPr>
           <a:lstStyle/>
           <a:p>
-            <a:pPr algn="l" indent="0" marL="0">
+            <a:pPr marL="0" indent="0" algn="l">
               <a:lnSpc>
                 <a:spcPct val="113000"/>
               </a:lnSpc>
@@ -4105,17 +3784,17 @@
       </p:sp>
       <p:pic>
         <p:nvPicPr>
-          <p:cNvPr id="13" name="Image 3" descr="preencoded.png">    </p:cNvPr>
+          <p:cNvPr id="13" name="Image 3" descr="preencoded.png"/>
           <p:cNvPicPr>
             <a:picLocks noChangeAspect="1"/>
           </p:cNvPicPr>
           <p:nvPr/>
         </p:nvPicPr>
         <p:blipFill>
-          <a:blip r:embed="rId6">
+          <a:blip>
             <a:extLst>
               <a:ext uri="{96DAC541-7B7A-43D3-8B79-37D633B846F1}">
-                <asvg:svgBlip xmlns:asvg="http://schemas.microsoft.com/office/drawing/2016/SVG/main" r:embed="rId7"/>
+                <asvg:svgBlip xmlns:asvg="http://schemas.microsoft.com/office/drawing/2016/SVG/main" r:embed="rId5"/>
               </a:ext>
             </a:extLst>
           </a:blip>
@@ -4154,7 +3833,7 @@
           <a:bodyPr wrap="none" lIns="0" tIns="0" rIns="0" bIns="0" rtlCol="0" anchor="t"/>
           <a:lstStyle/>
           <a:p>
-            <a:pPr algn="l" indent="0" marL="0">
+            <a:pPr marL="0" indent="0" algn="l">
               <a:lnSpc>
                 <a:spcPct val="104000"/>
               </a:lnSpc>
@@ -4198,7 +3877,7 @@
           </a:bodyPr>
           <a:lstStyle/>
           <a:p>
-            <a:pPr algn="l" indent="0" marL="0">
+            <a:pPr marL="0" indent="0" algn="l">
               <a:lnSpc>
                 <a:spcPct val="113000"/>
               </a:lnSpc>
@@ -4240,7 +3919,7 @@
           <a:bodyPr wrap="none" lIns="0" tIns="0" rIns="0" bIns="0" rtlCol="0" anchor="t"/>
           <a:lstStyle/>
           <a:p>
-            <a:pPr algn="l" indent="0" marL="0">
+            <a:pPr marL="0" indent="0" algn="l">
               <a:lnSpc>
                 <a:spcPct val="104000"/>
               </a:lnSpc>
@@ -4284,7 +3963,7 @@
           </a:bodyPr>
           <a:lstStyle/>
           <a:p>
-            <a:pPr algn="l" indent="0" marL="0">
+            <a:pPr marL="0" indent="0" algn="l">
               <a:lnSpc>
                 <a:spcPct val="113000"/>
               </a:lnSpc>
@@ -4351,7 +4030,7 @@
           <a:bodyPr wrap="none" lIns="0" tIns="0" rIns="0" bIns="0" rtlCol="0" anchor="t"/>
           <a:lstStyle/>
           <a:p>
-            <a:pPr algn="l" indent="0" marL="0">
+            <a:pPr marL="0" indent="0" algn="l">
               <a:lnSpc>
                 <a:spcPct val="104000"/>
               </a:lnSpc>
@@ -4395,7 +4074,7 @@
           </a:bodyPr>
           <a:lstStyle/>
           <a:p>
-            <a:pPr algn="l" indent="0" marL="0">
+            <a:pPr marL="0" indent="0" algn="l">
               <a:lnSpc>
                 <a:spcPct val="133000"/>
               </a:lnSpc>
@@ -4418,227 +4097,7 @@
       </p:sp>
       <p:pic>
         <p:nvPicPr>
-          <p:cNvPr id="4" name="Image 0" descr="preencoded.png">    </p:cNvPr>
-          <p:cNvPicPr>
-            <a:picLocks noChangeAspect="1"/>
-          </p:cNvPicPr>
-          <p:nvPr/>
-        </p:nvPicPr>
-        <p:blipFill>
-          <a:blip r:embed="rId1"/>
-          <a:stretch>
-            <a:fillRect/>
-          </a:stretch>
-        </p:blipFill>
-        <p:spPr>
-          <a:xfrm>
-            <a:off x="661475" y="2839541"/>
-            <a:ext cx="3622882" cy="756047"/>
-          </a:xfrm>
-          <a:prstGeom prst="rect">
-            <a:avLst/>
-          </a:prstGeom>
-        </p:spPr>
-      </p:pic>
-      <p:sp>
-        <p:nvSpPr>
-          <p:cNvPr id="5" name="Text 2"/>
-          <p:cNvSpPr/>
-          <p:nvPr/>
-        </p:nvSpPr>
-        <p:spPr>
-          <a:xfrm>
-            <a:off x="850482" y="3784600"/>
-            <a:ext cx="3244868" cy="295275"/>
-          </a:xfrm>
-          <a:prstGeom prst="rect">
-            <a:avLst/>
-          </a:prstGeom>
-          <a:noFill/>
-          <a:ln/>
-        </p:spPr>
-        <p:txBody>
-          <a:bodyPr wrap="none" lIns="0" tIns="0" rIns="0" bIns="0" rtlCol="0" anchor="t"/>
-          <a:lstStyle/>
-          <a:p>
-            <a:pPr algn="l" indent="0" marL="0">
-              <a:lnSpc>
-                <a:spcPct val="104000"/>
-              </a:lnSpc>
-              <a:buNone/>
-            </a:pPr>
-            <a:r>
-              <a:rPr lang="en-US" sz="1850" b="1" dirty="0">
-                <a:solidFill>
-                  <a:srgbClr val="000000"/>
-                </a:solidFill>
-                <a:latin typeface="Montserrat Bold" pitchFamily="34" charset="0"/>
-                <a:ea typeface="Montserrat Bold" pitchFamily="34" charset="-122"/>
-                <a:cs typeface="Montserrat Bold" pitchFamily="34" charset="-120"/>
-              </a:rPr>
-              <a:t>Исходные данные</a:t>
-            </a:r>
-            <a:endParaRPr lang="en-US" sz="1850" dirty="0"/>
-          </a:p>
-        </p:txBody>
-      </p:sp>
-      <p:sp>
-        <p:nvSpPr>
-          <p:cNvPr id="6" name="Text 3"/>
-          <p:cNvSpPr/>
-          <p:nvPr/>
-        </p:nvSpPr>
-        <p:spPr>
-          <a:xfrm>
-            <a:off x="850482" y="4193282"/>
-            <a:ext cx="3244868" cy="907256"/>
-          </a:xfrm>
-          <a:prstGeom prst="rect">
-            <a:avLst/>
-          </a:prstGeom>
-          <a:noFill/>
-          <a:ln/>
-        </p:spPr>
-        <p:txBody>
-          <a:bodyPr wrap="square" lIns="0" tIns="0" rIns="0" bIns="0" rtlCol="0" anchor="t">
-            <a:normAutofit/>
-          </a:bodyPr>
-          <a:lstStyle/>
-          <a:p>
-            <a:pPr algn="l" indent="0" marL="0">
-              <a:lnSpc>
-                <a:spcPct val="133000"/>
-              </a:lnSpc>
-              <a:buNone/>
-            </a:pPr>
-            <a:r>
-              <a:rPr lang="en-US" sz="1450" dirty="0">
-                <a:solidFill>
-                  <a:srgbClr val="000000"/>
-                </a:solidFill>
-                <a:latin typeface="Open Sans" pitchFamily="34" charset="0"/>
-                <a:ea typeface="Open Sans" pitchFamily="34" charset="-122"/>
-                <a:cs typeface="Open Sans" pitchFamily="34" charset="-120"/>
-              </a:rPr>
-              <a:t>Состояние системы и входные значения перед началом проверки</a:t>
-            </a:r>
-            <a:endParaRPr lang="en-US" sz="1450" dirty="0"/>
-          </a:p>
-        </p:txBody>
-      </p:sp>
-      <p:pic>
-        <p:nvPicPr>
-          <p:cNvPr id="7" name="Image 1" descr="preencoded.png">    </p:cNvPr>
-          <p:cNvPicPr>
-            <a:picLocks noChangeAspect="1"/>
-          </p:cNvPicPr>
-          <p:nvPr/>
-        </p:nvPicPr>
-        <p:blipFill>
-          <a:blip r:embed="rId2"/>
-          <a:stretch>
-            <a:fillRect/>
-          </a:stretch>
-        </p:blipFill>
-        <p:spPr>
-          <a:xfrm>
-            <a:off x="4284357" y="2839541"/>
-            <a:ext cx="3622882" cy="756047"/>
-          </a:xfrm>
-          <a:prstGeom prst="rect">
-            <a:avLst/>
-          </a:prstGeom>
-        </p:spPr>
-      </p:pic>
-      <p:sp>
-        <p:nvSpPr>
-          <p:cNvPr id="8" name="Text 4"/>
-          <p:cNvSpPr/>
-          <p:nvPr/>
-        </p:nvSpPr>
-        <p:spPr>
-          <a:xfrm>
-            <a:off x="4473364" y="3784600"/>
-            <a:ext cx="3244868" cy="295275"/>
-          </a:xfrm>
-          <a:prstGeom prst="rect">
-            <a:avLst/>
-          </a:prstGeom>
-          <a:noFill/>
-          <a:ln/>
-        </p:spPr>
-        <p:txBody>
-          <a:bodyPr wrap="none" lIns="0" tIns="0" rIns="0" bIns="0" rtlCol="0" anchor="t"/>
-          <a:lstStyle/>
-          <a:p>
-            <a:pPr algn="l" indent="0" marL="0">
-              <a:lnSpc>
-                <a:spcPct val="104000"/>
-              </a:lnSpc>
-              <a:buNone/>
-            </a:pPr>
-            <a:r>
-              <a:rPr lang="en-US" sz="1850" b="1" dirty="0">
-                <a:solidFill>
-                  <a:srgbClr val="000000"/>
-                </a:solidFill>
-                <a:latin typeface="Montserrat Bold" pitchFamily="34" charset="0"/>
-                <a:ea typeface="Montserrat Bold" pitchFamily="34" charset="-122"/>
-                <a:cs typeface="Montserrat Bold" pitchFamily="34" charset="-120"/>
-              </a:rPr>
-              <a:t>Действия</a:t>
-            </a:r>
-            <a:endParaRPr lang="en-US" sz="1850" dirty="0"/>
-          </a:p>
-        </p:txBody>
-      </p:sp>
-      <p:sp>
-        <p:nvSpPr>
-          <p:cNvPr id="9" name="Text 5"/>
-          <p:cNvSpPr/>
-          <p:nvPr/>
-        </p:nvSpPr>
-        <p:spPr>
-          <a:xfrm>
-            <a:off x="4473364" y="4193282"/>
-            <a:ext cx="3244868" cy="604838"/>
-          </a:xfrm>
-          <a:prstGeom prst="rect">
-            <a:avLst/>
-          </a:prstGeom>
-          <a:noFill/>
-          <a:ln/>
-        </p:spPr>
-        <p:txBody>
-          <a:bodyPr wrap="square" lIns="0" tIns="0" rIns="0" bIns="0" rtlCol="0" anchor="t">
-            <a:normAutofit/>
-          </a:bodyPr>
-          <a:lstStyle/>
-          <a:p>
-            <a:pPr algn="l" indent="0" marL="0">
-              <a:lnSpc>
-                <a:spcPct val="133000"/>
-              </a:lnSpc>
-              <a:buNone/>
-            </a:pPr>
-            <a:r>
-              <a:rPr lang="en-US" sz="1450" dirty="0">
-                <a:solidFill>
-                  <a:srgbClr val="000000"/>
-                </a:solidFill>
-                <a:latin typeface="Open Sans" pitchFamily="34" charset="0"/>
-                <a:ea typeface="Open Sans" pitchFamily="34" charset="-122"/>
-                <a:cs typeface="Open Sans" pitchFamily="34" charset="-120"/>
-              </a:rPr>
-              <a:t>Что именно делает тестировщик — шаг за шагом</a:t>
-            </a:r>
-            <a:endParaRPr lang="en-US" sz="1450" dirty="0"/>
-          </a:p>
-        </p:txBody>
-      </p:sp>
-      <p:pic>
-        <p:nvPicPr>
-          <p:cNvPr id="10" name="Image 2" descr="preencoded.png">    </p:cNvPr>
+          <p:cNvPr id="4" name="Image 0" descr="preencoded.png"/>
           <p:cNvPicPr>
             <a:picLocks noChangeAspect="1"/>
           </p:cNvPicPr>
@@ -4652,7 +4111,7 @@
         </p:blipFill>
         <p:spPr>
           <a:xfrm>
-            <a:off x="7907239" y="2839541"/>
+            <a:off x="661475" y="2839541"/>
             <a:ext cx="3622882" cy="756047"/>
           </a:xfrm>
           <a:prstGeom prst="rect">
@@ -4662,13 +4121,13 @@
       </p:pic>
       <p:sp>
         <p:nvSpPr>
-          <p:cNvPr id="11" name="Text 6"/>
-          <p:cNvSpPr/>
-          <p:nvPr/>
-        </p:nvSpPr>
-        <p:spPr>
-          <a:xfrm>
-            <a:off x="8096246" y="3784600"/>
+          <p:cNvPr id="5" name="Text 2"/>
+          <p:cNvSpPr/>
+          <p:nvPr/>
+        </p:nvSpPr>
+        <p:spPr>
+          <a:xfrm>
+            <a:off x="850482" y="3784600"/>
             <a:ext cx="3244868" cy="295275"/>
           </a:xfrm>
           <a:prstGeom prst="rect">
@@ -4681,7 +4140,7 @@
           <a:bodyPr wrap="none" lIns="0" tIns="0" rIns="0" bIns="0" rtlCol="0" anchor="t"/>
           <a:lstStyle/>
           <a:p>
-            <a:pPr algn="l" indent="0" marL="0">
+            <a:pPr marL="0" indent="0" algn="l">
               <a:lnSpc>
                 <a:spcPct val="104000"/>
               </a:lnSpc>
@@ -4696,7 +4155,7 @@
                 <a:ea typeface="Montserrat Bold" pitchFamily="34" charset="-122"/>
                 <a:cs typeface="Montserrat Bold" pitchFamily="34" charset="-120"/>
               </a:rPr>
-              <a:t>Ожидаемый результат</a:t>
+              <a:t>Исходные данные</a:t>
             </a:r>
             <a:endParaRPr lang="en-US" sz="1850" dirty="0"/>
           </a:p>
@@ -4704,14 +4163,14 @@
       </p:sp>
       <p:sp>
         <p:nvSpPr>
-          <p:cNvPr id="12" name="Text 7"/>
-          <p:cNvSpPr/>
-          <p:nvPr/>
-        </p:nvSpPr>
-        <p:spPr>
-          <a:xfrm>
-            <a:off x="8096246" y="4193282"/>
-            <a:ext cx="3244868" cy="604838"/>
+          <p:cNvPr id="6" name="Text 3"/>
+          <p:cNvSpPr/>
+          <p:nvPr/>
+        </p:nvSpPr>
+        <p:spPr>
+          <a:xfrm>
+            <a:off x="850482" y="4193282"/>
+            <a:ext cx="3244868" cy="907256"/>
           </a:xfrm>
           <a:prstGeom prst="rect">
             <a:avLst/>
@@ -4725,7 +4184,7 @@
           </a:bodyPr>
           <a:lstStyle/>
           <a:p>
-            <a:pPr algn="l" indent="0" marL="0">
+            <a:pPr marL="0" indent="0" algn="l">
               <a:lnSpc>
                 <a:spcPct val="133000"/>
               </a:lnSpc>
@@ -4740,6 +4199,226 @@
                 <a:ea typeface="Open Sans" pitchFamily="34" charset="-122"/>
                 <a:cs typeface="Open Sans" pitchFamily="34" charset="-120"/>
               </a:rPr>
+              <a:t>Состояние системы и входные значения перед началом проверки</a:t>
+            </a:r>
+            <a:endParaRPr lang="en-US" sz="1450" dirty="0"/>
+          </a:p>
+        </p:txBody>
+      </p:sp>
+      <p:pic>
+        <p:nvPicPr>
+          <p:cNvPr id="7" name="Image 1" descr="preencoded.png"/>
+          <p:cNvPicPr>
+            <a:picLocks noChangeAspect="1"/>
+          </p:cNvPicPr>
+          <p:nvPr/>
+        </p:nvPicPr>
+        <p:blipFill>
+          <a:blip r:embed="rId4"/>
+          <a:stretch>
+            <a:fillRect/>
+          </a:stretch>
+        </p:blipFill>
+        <p:spPr>
+          <a:xfrm>
+            <a:off x="4284357" y="2839541"/>
+            <a:ext cx="3622882" cy="756047"/>
+          </a:xfrm>
+          <a:prstGeom prst="rect">
+            <a:avLst/>
+          </a:prstGeom>
+        </p:spPr>
+      </p:pic>
+      <p:sp>
+        <p:nvSpPr>
+          <p:cNvPr id="8" name="Text 4"/>
+          <p:cNvSpPr/>
+          <p:nvPr/>
+        </p:nvSpPr>
+        <p:spPr>
+          <a:xfrm>
+            <a:off x="4473364" y="3784600"/>
+            <a:ext cx="3244868" cy="295275"/>
+          </a:xfrm>
+          <a:prstGeom prst="rect">
+            <a:avLst/>
+          </a:prstGeom>
+          <a:noFill/>
+          <a:ln/>
+        </p:spPr>
+        <p:txBody>
+          <a:bodyPr wrap="none" lIns="0" tIns="0" rIns="0" bIns="0" rtlCol="0" anchor="t"/>
+          <a:lstStyle/>
+          <a:p>
+            <a:pPr marL="0" indent="0" algn="l">
+              <a:lnSpc>
+                <a:spcPct val="104000"/>
+              </a:lnSpc>
+              <a:buNone/>
+            </a:pPr>
+            <a:r>
+              <a:rPr lang="en-US" sz="1850" b="1" dirty="0">
+                <a:solidFill>
+                  <a:srgbClr val="000000"/>
+                </a:solidFill>
+                <a:latin typeface="Montserrat Bold" pitchFamily="34" charset="0"/>
+                <a:ea typeface="Montserrat Bold" pitchFamily="34" charset="-122"/>
+                <a:cs typeface="Montserrat Bold" pitchFamily="34" charset="-120"/>
+              </a:rPr>
+              <a:t>Действия</a:t>
+            </a:r>
+            <a:endParaRPr lang="en-US" sz="1850" dirty="0"/>
+          </a:p>
+        </p:txBody>
+      </p:sp>
+      <p:sp>
+        <p:nvSpPr>
+          <p:cNvPr id="9" name="Text 5"/>
+          <p:cNvSpPr/>
+          <p:nvPr/>
+        </p:nvSpPr>
+        <p:spPr>
+          <a:xfrm>
+            <a:off x="4473364" y="4193282"/>
+            <a:ext cx="3244868" cy="604838"/>
+          </a:xfrm>
+          <a:prstGeom prst="rect">
+            <a:avLst/>
+          </a:prstGeom>
+          <a:noFill/>
+          <a:ln/>
+        </p:spPr>
+        <p:txBody>
+          <a:bodyPr wrap="square" lIns="0" tIns="0" rIns="0" bIns="0" rtlCol="0" anchor="t">
+            <a:normAutofit/>
+          </a:bodyPr>
+          <a:lstStyle/>
+          <a:p>
+            <a:pPr marL="0" indent="0" algn="l">
+              <a:lnSpc>
+                <a:spcPct val="133000"/>
+              </a:lnSpc>
+              <a:buNone/>
+            </a:pPr>
+            <a:r>
+              <a:rPr lang="en-US" sz="1450" dirty="0">
+                <a:solidFill>
+                  <a:srgbClr val="000000"/>
+                </a:solidFill>
+                <a:latin typeface="Open Sans" pitchFamily="34" charset="0"/>
+                <a:ea typeface="Open Sans" pitchFamily="34" charset="-122"/>
+                <a:cs typeface="Open Sans" pitchFamily="34" charset="-120"/>
+              </a:rPr>
+              <a:t>Что именно делает тестировщик — шаг за шагом</a:t>
+            </a:r>
+            <a:endParaRPr lang="en-US" sz="1450" dirty="0"/>
+          </a:p>
+        </p:txBody>
+      </p:sp>
+      <p:pic>
+        <p:nvPicPr>
+          <p:cNvPr id="10" name="Image 2" descr="preencoded.png"/>
+          <p:cNvPicPr>
+            <a:picLocks noChangeAspect="1"/>
+          </p:cNvPicPr>
+          <p:nvPr/>
+        </p:nvPicPr>
+        <p:blipFill>
+          <a:blip r:embed="rId5"/>
+          <a:stretch>
+            <a:fillRect/>
+          </a:stretch>
+        </p:blipFill>
+        <p:spPr>
+          <a:xfrm>
+            <a:off x="7907239" y="2839541"/>
+            <a:ext cx="3622882" cy="756047"/>
+          </a:xfrm>
+          <a:prstGeom prst="rect">
+            <a:avLst/>
+          </a:prstGeom>
+        </p:spPr>
+      </p:pic>
+      <p:sp>
+        <p:nvSpPr>
+          <p:cNvPr id="11" name="Text 6"/>
+          <p:cNvSpPr/>
+          <p:nvPr/>
+        </p:nvSpPr>
+        <p:spPr>
+          <a:xfrm>
+            <a:off x="8096246" y="3784600"/>
+            <a:ext cx="3244868" cy="295275"/>
+          </a:xfrm>
+          <a:prstGeom prst="rect">
+            <a:avLst/>
+          </a:prstGeom>
+          <a:noFill/>
+          <a:ln/>
+        </p:spPr>
+        <p:txBody>
+          <a:bodyPr wrap="none" lIns="0" tIns="0" rIns="0" bIns="0" rtlCol="0" anchor="t"/>
+          <a:lstStyle/>
+          <a:p>
+            <a:pPr marL="0" indent="0" algn="l">
+              <a:lnSpc>
+                <a:spcPct val="104000"/>
+              </a:lnSpc>
+              <a:buNone/>
+            </a:pPr>
+            <a:r>
+              <a:rPr lang="en-US" sz="1850" b="1" dirty="0">
+                <a:solidFill>
+                  <a:srgbClr val="000000"/>
+                </a:solidFill>
+                <a:latin typeface="Montserrat Bold" pitchFamily="34" charset="0"/>
+                <a:ea typeface="Montserrat Bold" pitchFamily="34" charset="-122"/>
+                <a:cs typeface="Montserrat Bold" pitchFamily="34" charset="-120"/>
+              </a:rPr>
+              <a:t>Ожидаемый результат</a:t>
+            </a:r>
+            <a:endParaRPr lang="en-US" sz="1850" dirty="0"/>
+          </a:p>
+        </p:txBody>
+      </p:sp>
+      <p:sp>
+        <p:nvSpPr>
+          <p:cNvPr id="12" name="Text 7"/>
+          <p:cNvSpPr/>
+          <p:nvPr/>
+        </p:nvSpPr>
+        <p:spPr>
+          <a:xfrm>
+            <a:off x="8096246" y="4193282"/>
+            <a:ext cx="3244868" cy="604838"/>
+          </a:xfrm>
+          <a:prstGeom prst="rect">
+            <a:avLst/>
+          </a:prstGeom>
+          <a:noFill/>
+          <a:ln/>
+        </p:spPr>
+        <p:txBody>
+          <a:bodyPr wrap="square" lIns="0" tIns="0" rIns="0" bIns="0" rtlCol="0" anchor="t">
+            <a:normAutofit/>
+          </a:bodyPr>
+          <a:lstStyle/>
+          <a:p>
+            <a:pPr marL="0" indent="0" algn="l">
+              <a:lnSpc>
+                <a:spcPct val="133000"/>
+              </a:lnSpc>
+              <a:buNone/>
+            </a:pPr>
+            <a:r>
+              <a:rPr lang="en-US" sz="1450" dirty="0">
+                <a:solidFill>
+                  <a:srgbClr val="000000"/>
+                </a:solidFill>
+                <a:latin typeface="Open Sans" pitchFamily="34" charset="0"/>
+                <a:ea typeface="Open Sans" pitchFamily="34" charset="-122"/>
+                <a:cs typeface="Open Sans" pitchFamily="34" charset="-120"/>
+              </a:rPr>
               <a:t>Что должно произойти в системе после выполнения действий</a:t>
             </a:r>
             <a:endParaRPr lang="en-US" sz="1450" dirty="0"/>
@@ -4767,7 +4446,7 @@
           <a:bodyPr wrap="none" lIns="0" tIns="0" rIns="0" bIns="0" rtlCol="0" anchor="t"/>
           <a:lstStyle/>
           <a:p>
-            <a:pPr algn="l" indent="0" marL="0">
+            <a:pPr marL="0" indent="0" algn="l">
               <a:lnSpc>
                 <a:spcPct val="133000"/>
               </a:lnSpc>
@@ -4815,14 +4494,14 @@
       </p:grpSpPr>
       <p:pic>
         <p:nvPicPr>
-          <p:cNvPr id="2" name="Image 0" descr="preencoded.png">    </p:cNvPr>
+          <p:cNvPr id="2" name="Image 0" descr="preencoded.png"/>
           <p:cNvPicPr>
             <a:picLocks noChangeAspect="1"/>
           </p:cNvPicPr>
           <p:nvPr/>
         </p:nvPicPr>
         <p:blipFill>
-          <a:blip r:embed="rId1"/>
+          <a:blip r:embed="rId3"/>
           <a:stretch>
             <a:fillRect/>
           </a:stretch>
@@ -4860,7 +4539,7 @@
           </a:bodyPr>
           <a:lstStyle/>
           <a:p>
-            <a:pPr algn="l" indent="0" marL="0">
+            <a:pPr marL="0" indent="0" algn="l">
               <a:lnSpc>
                 <a:spcPct val="104000"/>
               </a:lnSpc>
@@ -4904,7 +4583,7 @@
           </a:bodyPr>
           <a:lstStyle/>
           <a:p>
-            <a:pPr algn="l" indent="0" marL="0">
+            <a:pPr marL="0" indent="0" algn="l">
               <a:lnSpc>
                 <a:spcPct val="133000"/>
               </a:lnSpc>
@@ -4921,12 +4600,6 @@
               </a:rPr>
               <a:t>Проверить все возможные варианты невозможно. Нужно выбрать такие условия, при которых поведение системы действительно может </a:t>
             </a:r>
-            <a:pPr algn="l" indent="0" marL="0">
-              <a:lnSpc>
-                <a:spcPct val="133000"/>
-              </a:lnSpc>
-              <a:buNone/>
-            </a:pPr>
             <a:r>
               <a:rPr lang="en-US" sz="1450" b="1" dirty="0">
                 <a:solidFill>
@@ -4938,12 +4611,6 @@
               </a:rPr>
               <a:t>различаться</a:t>
             </a:r>
-            <a:pPr algn="l" indent="0" marL="0">
-              <a:lnSpc>
-                <a:spcPct val="133000"/>
-              </a:lnSpc>
-              <a:buNone/>
-            </a:pPr>
             <a:r>
               <a:rPr lang="en-US" sz="1450" dirty="0">
                 <a:solidFill>
@@ -4980,7 +4647,7 @@
           <a:bodyPr wrap="none" lIns="0" tIns="0" rIns="0" bIns="0" rtlCol="0" anchor="t"/>
           <a:lstStyle/>
           <a:p>
-            <a:pPr algn="l" indent="0" marL="0">
+            <a:pPr marL="0" indent="0" algn="l">
               <a:lnSpc>
                 <a:spcPct val="104000"/>
               </a:lnSpc>
@@ -5024,7 +4691,7 @@
           </a:bodyPr>
           <a:lstStyle/>
           <a:p>
-            <a:pPr algn="l" indent="0" marL="0">
+            <a:pPr marL="0" indent="0" algn="l">
               <a:lnSpc>
                 <a:spcPct val="133000"/>
               </a:lnSpc>
@@ -5069,14 +4736,14 @@
       </p:sp>
       <p:pic>
         <p:nvPicPr>
-          <p:cNvPr id="8" name="Image 1" descr="preencoded.png">    </p:cNvPr>
+          <p:cNvPr id="8" name="Image 1" descr="preencoded.png"/>
           <p:cNvPicPr>
             <a:picLocks noChangeAspect="1"/>
           </p:cNvPicPr>
           <p:nvPr/>
         </p:nvPicPr>
         <p:blipFill>
-          <a:blip r:embed="rId2"/>
+          <a:blip r:embed="rId4"/>
           <a:stretch>
             <a:fillRect/>
           </a:stretch>
@@ -5114,7 +4781,7 @@
           </a:bodyPr>
           <a:lstStyle/>
           <a:p>
-            <a:pPr algn="l" indent="0" marL="0">
+            <a:pPr marL="0" indent="0" algn="l">
               <a:lnSpc>
                 <a:spcPct val="133000"/>
               </a:lnSpc>
@@ -5181,7 +4848,7 @@
           <a:bodyPr wrap="none" lIns="0" tIns="0" rIns="0" bIns="0" rtlCol="0" anchor="t"/>
           <a:lstStyle/>
           <a:p>
-            <a:pPr algn="l" indent="0" marL="0">
+            <a:pPr marL="0" indent="0" algn="l">
               <a:lnSpc>
                 <a:spcPct val="104000"/>
               </a:lnSpc>
@@ -5204,14 +4871,14 @@
       </p:sp>
       <p:pic>
         <p:nvPicPr>
-          <p:cNvPr id="3" name="Image 0" descr="preencoded.png">    </p:cNvPr>
+          <p:cNvPr id="3" name="Image 0" descr="preencoded.png"/>
           <p:cNvPicPr>
             <a:picLocks noChangeAspect="1"/>
           </p:cNvPicPr>
           <p:nvPr/>
         </p:nvPicPr>
         <p:blipFill>
-          <a:blip r:embed="rId1"/>
+          <a:blip r:embed="rId3"/>
           <a:stretch>
             <a:fillRect/>
           </a:stretch>
@@ -5247,7 +4914,7 @@
           <a:bodyPr wrap="none" lIns="0" tIns="0" rIns="0" bIns="0" rtlCol="0" anchor="t"/>
           <a:lstStyle/>
           <a:p>
-            <a:pPr algn="l" indent="0" marL="0">
+            <a:pPr marL="0" indent="0" algn="l">
               <a:lnSpc>
                 <a:spcPct val="104000"/>
               </a:lnSpc>
@@ -5291,7 +4958,7 @@
           </a:bodyPr>
           <a:lstStyle/>
           <a:p>
-            <a:pPr algn="l" indent="0" marL="0">
+            <a:pPr marL="0" indent="0" algn="l">
               <a:lnSpc>
                 <a:spcPct val="91000"/>
               </a:lnSpc>
@@ -5335,7 +5002,7 @@
           </a:bodyPr>
           <a:lstStyle/>
           <a:p>
-            <a:pPr algn="l" indent="0" marL="0">
+            <a:pPr marL="0" indent="0" algn="l">
               <a:lnSpc>
                 <a:spcPct val="104000"/>
               </a:lnSpc>
@@ -5379,7 +5046,7 @@
           </a:bodyPr>
           <a:lstStyle/>
           <a:p>
-            <a:pPr algn="l" indent="0" marL="0">
+            <a:pPr marL="0" indent="0" algn="l">
               <a:lnSpc>
                 <a:spcPct val="91000"/>
               </a:lnSpc>
@@ -5421,7 +5088,7 @@
           <a:bodyPr wrap="none" lIns="0" tIns="0" rIns="0" bIns="0" rtlCol="0" anchor="t"/>
           <a:lstStyle/>
           <a:p>
-            <a:pPr algn="l" indent="0" marL="0">
+            <a:pPr marL="0" indent="0" algn="l">
               <a:lnSpc>
                 <a:spcPct val="104000"/>
               </a:lnSpc>
@@ -5465,7 +5132,7 @@
           </a:bodyPr>
           <a:lstStyle/>
           <a:p>
-            <a:pPr algn="l" indent="0" marL="0">
+            <a:pPr marL="0" indent="0" algn="l">
               <a:lnSpc>
                 <a:spcPct val="117000"/>
               </a:lnSpc>
@@ -5482,12 +5149,6 @@
               </a:rPr>
               <a:t>Ожидаемый результат нужно знать </a:t>
             </a:r>
-            <a:pPr algn="l" indent="0" marL="0">
-              <a:lnSpc>
-                <a:spcPct val="117000"/>
-              </a:lnSpc>
-              <a:buNone/>
-            </a:pPr>
             <a:r>
               <a:rPr lang="en-US" sz="1100" b="1" dirty="0">
                 <a:solidFill>
@@ -5499,12 +5160,6 @@
               </a:rPr>
               <a:t>до</a:t>
             </a:r>
-            <a:pPr algn="l" indent="0" marL="0">
-              <a:lnSpc>
-                <a:spcPct val="117000"/>
-              </a:lnSpc>
-              <a:buNone/>
-            </a:pPr>
             <a:r>
               <a:rPr lang="en-US" sz="1100" dirty="0">
                 <a:solidFill>
@@ -5541,7 +5196,7 @@
           <a:bodyPr wrap="none" lIns="0" tIns="0" rIns="0" bIns="0" rtlCol="0" anchor="t"/>
           <a:lstStyle/>
           <a:p>
-            <a:pPr algn="l" indent="0" marL="0">
+            <a:pPr marL="0" indent="0" algn="l">
               <a:lnSpc>
                 <a:spcPct val="104000"/>
               </a:lnSpc>
@@ -5585,7 +5240,7 @@
           </a:bodyPr>
           <a:lstStyle/>
           <a:p>
-            <a:pPr algn="l" indent="0" marL="0">
+            <a:pPr marL="0" indent="0" algn="l">
               <a:lnSpc>
                 <a:spcPct val="117000"/>
               </a:lnSpc>
@@ -5602,12 +5257,6 @@
               </a:rPr>
               <a:t>Он должен выводиться из тестовой основы. Если в требованиях есть пробелы — это нужно выявить и уточнить </a:t>
             </a:r>
-            <a:pPr algn="l" indent="0" marL="0">
-              <a:lnSpc>
-                <a:spcPct val="117000"/>
-              </a:lnSpc>
-              <a:buNone/>
-            </a:pPr>
             <a:r>
               <a:rPr lang="en-US" sz="1100" b="1" dirty="0">
                 <a:solidFill>
@@ -5619,12 +5268,6 @@
               </a:rPr>
               <a:t>перед</a:t>
             </a:r>
-            <a:pPr algn="l" indent="0" marL="0">
-              <a:lnSpc>
-                <a:spcPct val="117000"/>
-              </a:lnSpc>
-              <a:buNone/>
-            </a:pPr>
             <a:r>
               <a:rPr lang="en-US" sz="1100" dirty="0">
                 <a:solidFill>
@@ -5687,14 +5330,14 @@
       </p:sp>
       <p:pic>
         <p:nvPicPr>
-          <p:cNvPr id="3" name="Image 0" descr="preencoded.png">    </p:cNvPr>
+          <p:cNvPr id="3" name="Image 0" descr="preencoded.png"/>
           <p:cNvPicPr>
             <a:picLocks noChangeAspect="1"/>
           </p:cNvPicPr>
           <p:nvPr/>
         </p:nvPicPr>
         <p:blipFill>
-          <a:blip r:embed="rId1"/>
+          <a:blip r:embed="rId3"/>
           <a:stretch>
             <a:fillRect/>
           </a:stretch>
@@ -5732,7 +5375,7 @@
           </a:bodyPr>
           <a:lstStyle/>
           <a:p>
-            <a:pPr algn="l" indent="0" marL="0">
+            <a:pPr marL="0" indent="0" algn="l">
               <a:lnSpc>
                 <a:spcPct val="104000"/>
               </a:lnSpc>
@@ -5776,7 +5419,7 @@
           </a:bodyPr>
           <a:lstStyle/>
           <a:p>
-            <a:pPr algn="l" indent="0" marL="0">
+            <a:pPr marL="0" indent="0" algn="l">
               <a:lnSpc>
                 <a:spcPct val="130000"/>
               </a:lnSpc>
@@ -5793,12 +5436,6 @@
               </a:rPr>
               <a:t>Покрытие показывает, какая часть тестовой основы затронута проверками. Это не количество тестов, а </a:t>
             </a:r>
-            <a:pPr algn="l" indent="0" marL="0">
-              <a:lnSpc>
-                <a:spcPct val="130000"/>
-              </a:lnSpc>
-              <a:buNone/>
-            </a:pPr>
             <a:r>
               <a:rPr lang="en-US" sz="1400" b="1" dirty="0">
                 <a:solidFill>
@@ -5810,12 +5447,6 @@
               </a:rPr>
               <a:t>качество их распределения</a:t>
             </a:r>
-            <a:pPr algn="l" indent="0" marL="0">
-              <a:lnSpc>
-                <a:spcPct val="130000"/>
-              </a:lnSpc>
-              <a:buNone/>
-            </a:pPr>
             <a:r>
               <a:rPr lang="en-US" sz="1400" dirty="0">
                 <a:solidFill>
@@ -5883,7 +5514,7 @@
                 <a:lnTo>
                   <a:pt x="6221311" y="0"/>
                 </a:lnTo>
-                <a:arcTo hR="62850" wR="62849" stAng="16200000" swAng="5400000"/>
+                <a:arcTo wR="62849" hR="62850" stAng="16200000" swAng="5400000"/>
                 <a:lnTo>
                   <a:pt x="6284160" y="1301948"/>
                 </a:lnTo>
@@ -5893,7 +5524,7 @@
                 <a:lnTo>
                   <a:pt x="0" y="62850"/>
                 </a:lnTo>
-                <a:arcTo hR="62850" wR="62849" stAng="10800000" swAng="5400000"/>
+                <a:arcTo wR="62849" hR="62850" stAng="10800000" swAng="5400000"/>
                 <a:close/>
               </a:path>
             </a:pathLst>
@@ -5925,7 +5556,7 @@
           <a:bodyPr wrap="none" lIns="0" tIns="0" rIns="0" bIns="0" rtlCol="0" anchor="t"/>
           <a:lstStyle/>
           <a:p>
-            <a:pPr algn="l" indent="0" marL="0">
+            <a:pPr marL="0" indent="0" algn="l">
               <a:lnSpc>
                 <a:spcPct val="104000"/>
               </a:lnSpc>
@@ -5942,12 +5573,6 @@
               </a:rPr>
               <a:t>❌</a:t>
             </a:r>
-            <a:pPr algn="l" indent="0" marL="0">
-              <a:lnSpc>
-                <a:spcPct val="104000"/>
-              </a:lnSpc>
-              <a:buNone/>
-            </a:pPr>
             <a:r>
               <a:rPr lang="en-US" sz="1750" b="1" dirty="0">
                 <a:solidFill>
@@ -5986,7 +5611,7 @@
           </a:bodyPr>
           <a:lstStyle/>
           <a:p>
-            <a:pPr algn="l" indent="0" marL="0">
+            <a:pPr marL="0" indent="0" algn="l">
               <a:lnSpc>
                 <a:spcPct val="130000"/>
               </a:lnSpc>
@@ -6035,11 +5660,11 @@
                 <a:lnTo>
                   <a:pt x="6284160" y="1239098"/>
                 </a:lnTo>
-                <a:arcTo hR="62850" wR="62849" stAng="0" swAng="5400000"/>
+                <a:arcTo wR="62849" hR="62850" stAng="0" swAng="5400000"/>
                 <a:lnTo>
                   <a:pt x="62849" y="1301948"/>
                 </a:lnTo>
-                <a:arcTo hR="62850" wR="62849" stAng="5400000" swAng="5400000"/>
+                <a:arcTo wR="62849" hR="62850" stAng="5400000" swAng="5400000"/>
                 <a:lnTo>
                   <a:pt x="0" y="0"/>
                 </a:lnTo>
@@ -6096,7 +5721,7 @@
           <a:bodyPr wrap="none" lIns="0" tIns="0" rIns="0" bIns="0" rtlCol="0" anchor="t"/>
           <a:lstStyle/>
           <a:p>
-            <a:pPr algn="l" indent="0" marL="0">
+            <a:pPr marL="0" indent="0" algn="l">
               <a:lnSpc>
                 <a:spcPct val="104000"/>
               </a:lnSpc>
@@ -6113,12 +5738,6 @@
               </a:rPr>
               <a:t>✅</a:t>
             </a:r>
-            <a:pPr algn="l" indent="0" marL="0">
-              <a:lnSpc>
-                <a:spcPct val="104000"/>
-              </a:lnSpc>
-              <a:buNone/>
-            </a:pPr>
             <a:r>
               <a:rPr lang="en-US" sz="1750" b="1" dirty="0">
                 <a:solidFill>
@@ -6157,7 +5776,7 @@
           </a:bodyPr>
           <a:lstStyle/>
           <a:p>
-            <a:pPr algn="l" indent="0" marL="0">
+            <a:pPr marL="0" indent="0" algn="l">
               <a:lnSpc>
                 <a:spcPct val="130000"/>
               </a:lnSpc>
@@ -6201,7 +5820,7 @@
           </a:bodyPr>
           <a:lstStyle/>
           <a:p>
-            <a:pPr algn="l" indent="0" marL="0">
+            <a:pPr marL="0" indent="0" algn="l">
               <a:lnSpc>
                 <a:spcPct val="130000"/>
               </a:lnSpc>
@@ -6270,7 +5889,7 @@
           </a:bodyPr>
           <a:lstStyle/>
           <a:p>
-            <a:pPr algn="l" indent="0" marL="0">
+            <a:pPr marL="0" indent="0" algn="l">
               <a:lnSpc>
                 <a:spcPct val="104000"/>
               </a:lnSpc>
@@ -6314,7 +5933,7 @@
           </a:bodyPr>
           <a:lstStyle/>
           <a:p>
-            <a:pPr algn="l" indent="0" marL="0">
+            <a:pPr marL="0" indent="0" algn="l">
               <a:lnSpc>
                 <a:spcPct val="127000"/>
               </a:lnSpc>
@@ -6364,17 +5983,17 @@
       </p:sp>
       <p:pic>
         <p:nvPicPr>
-          <p:cNvPr id="5" name="Image 0" descr="preencoded.png">    </p:cNvPr>
+          <p:cNvPr id="5" name="Image 0" descr="preencoded.png"/>
           <p:cNvPicPr>
             <a:picLocks noChangeAspect="1"/>
           </p:cNvPicPr>
           <p:nvPr/>
         </p:nvPicPr>
         <p:blipFill>
-          <a:blip r:embed="rId1">
+          <a:blip>
             <a:extLst>
               <a:ext uri="{96DAC541-7B7A-43D3-8B79-37D633B846F1}">
-                <asvg:svgBlip xmlns:asvg="http://schemas.microsoft.com/office/drawing/2016/SVG/main" r:embed="rId2"/>
+                <asvg:svgBlip xmlns:asvg="http://schemas.microsoft.com/office/drawing/2016/SVG/main" r:embed="rId3"/>
               </a:ext>
             </a:extLst>
           </a:blip>
@@ -6413,7 +6032,7 @@
           <a:bodyPr wrap="none" lIns="0" tIns="0" rIns="0" bIns="0" rtlCol="0" anchor="t"/>
           <a:lstStyle/>
           <a:p>
-            <a:pPr algn="l" indent="0" marL="0">
+            <a:pPr marL="0" indent="0" algn="l">
               <a:lnSpc>
                 <a:spcPct val="104000"/>
               </a:lnSpc>
@@ -6455,7 +6074,7 @@
           <a:bodyPr wrap="none" lIns="0" tIns="0" rIns="0" bIns="0" rtlCol="0" anchor="t"/>
           <a:lstStyle/>
           <a:p>
-            <a:pPr algn="l" indent="0" marL="0">
+            <a:pPr marL="0" indent="0" algn="l">
               <a:lnSpc>
                 <a:spcPct val="127000"/>
               </a:lnSpc>
@@ -6527,14 +6146,14 @@
       </p:sp>
       <p:pic>
         <p:nvPicPr>
-          <p:cNvPr id="10" name="Image 1" descr="preencoded.png">    </p:cNvPr>
+          <p:cNvPr id="10" name="Image 1" descr="preencoded.png"/>
           <p:cNvPicPr>
             <a:picLocks noChangeAspect="1"/>
           </p:cNvPicPr>
           <p:nvPr/>
         </p:nvPicPr>
         <p:blipFill>
-          <a:blip r:embed="rId3">
+          <a:blip>
             <a:extLst>
               <a:ext uri="{96DAC541-7B7A-43D3-8B79-37D633B846F1}">
                 <asvg:svgBlip xmlns:asvg="http://schemas.microsoft.com/office/drawing/2016/SVG/main" r:embed="rId4"/>
@@ -6576,7 +6195,7 @@
           <a:bodyPr wrap="none" lIns="0" tIns="0" rIns="0" bIns="0" rtlCol="0" anchor="t"/>
           <a:lstStyle/>
           <a:p>
-            <a:pPr algn="l" indent="0" marL="0">
+            <a:pPr marL="0" indent="0" algn="l">
               <a:lnSpc>
                 <a:spcPct val="104000"/>
               </a:lnSpc>
@@ -6618,7 +6237,7 @@
           <a:bodyPr wrap="none" lIns="0" tIns="0" rIns="0" bIns="0" rtlCol="0" anchor="t"/>
           <a:lstStyle/>
           <a:p>
-            <a:pPr algn="l" indent="0" marL="0">
+            <a:pPr marL="0" indent="0" algn="l">
               <a:lnSpc>
                 <a:spcPct val="127000"/>
               </a:lnSpc>
@@ -6690,17 +6309,17 @@
       </p:sp>
       <p:pic>
         <p:nvPicPr>
-          <p:cNvPr id="15" name="Image 2" descr="preencoded.png">    </p:cNvPr>
+          <p:cNvPr id="15" name="Image 2" descr="preencoded.png"/>
           <p:cNvPicPr>
             <a:picLocks noChangeAspect="1"/>
           </p:cNvPicPr>
           <p:nvPr/>
         </p:nvPicPr>
         <p:blipFill>
-          <a:blip r:embed="rId5">
+          <a:blip>
             <a:extLst>
               <a:ext uri="{96DAC541-7B7A-43D3-8B79-37D633B846F1}">
-                <asvg:svgBlip xmlns:asvg="http://schemas.microsoft.com/office/drawing/2016/SVG/main" r:embed="rId6"/>
+                <asvg:svgBlip xmlns:asvg="http://schemas.microsoft.com/office/drawing/2016/SVG/main" r:embed="rId5"/>
               </a:ext>
             </a:extLst>
           </a:blip>
@@ -6739,7 +6358,7 @@
           <a:bodyPr wrap="none" lIns="0" tIns="0" rIns="0" bIns="0" rtlCol="0" anchor="t"/>
           <a:lstStyle/>
           <a:p>
-            <a:pPr algn="l" indent="0" marL="0">
+            <a:pPr marL="0" indent="0" algn="l">
               <a:lnSpc>
                 <a:spcPct val="104000"/>
               </a:lnSpc>
@@ -6781,7 +6400,7 @@
           <a:bodyPr wrap="none" lIns="0" tIns="0" rIns="0" bIns="0" rtlCol="0" anchor="t"/>
           <a:lstStyle/>
           <a:p>
-            <a:pPr algn="l" indent="0" marL="0">
+            <a:pPr marL="0" indent="0" algn="l">
               <a:lnSpc>
                 <a:spcPct val="127000"/>
               </a:lnSpc>
@@ -6823,7 +6442,7 @@
           <a:bodyPr wrap="none" lIns="0" tIns="0" rIns="0" bIns="0" rtlCol="0" anchor="t"/>
           <a:lstStyle/>
           <a:p>
-            <a:pPr algn="l" indent="0" marL="0">
+            <a:pPr marL="0" indent="0" algn="l">
               <a:lnSpc>
                 <a:spcPct val="127000"/>
               </a:lnSpc>
@@ -6871,14 +6490,14 @@
       </p:grpSpPr>
       <p:pic>
         <p:nvPicPr>
-          <p:cNvPr id="2" name="Image 0" descr="preencoded.png">    </p:cNvPr>
+          <p:cNvPr id="2" name="Image 0" descr="preencoded.png"/>
           <p:cNvPicPr>
             <a:picLocks noChangeAspect="1"/>
           </p:cNvPicPr>
           <p:nvPr/>
         </p:nvPicPr>
         <p:blipFill>
-          <a:blip r:embed="rId1"/>
+          <a:blip r:embed="rId3"/>
           <a:stretch>
             <a:fillRect/>
           </a:stretch>
@@ -6916,7 +6535,7 @@
           </a:bodyPr>
           <a:lstStyle/>
           <a:p>
-            <a:pPr algn="l" indent="0" marL="0">
+            <a:pPr marL="0" indent="0" algn="l">
               <a:lnSpc>
                 <a:spcPct val="104000"/>
               </a:lnSpc>
@@ -6960,7 +6579,7 @@
           </a:bodyPr>
           <a:lstStyle/>
           <a:p>
-            <a:pPr algn="l" indent="0" marL="0">
+            <a:pPr marL="0" indent="0" algn="l">
               <a:lnSpc>
                 <a:spcPct val="133000"/>
               </a:lnSpc>
@@ -6977,12 +6596,6 @@
               </a:rPr>
               <a:t>Каждый тест должен быть связан с требованием или условием, из которого он появился. Эта связь называется </a:t>
             </a:r>
-            <a:pPr algn="l" indent="0" marL="0">
-              <a:lnSpc>
-                <a:spcPct val="133000"/>
-              </a:lnSpc>
-              <a:buNone/>
-            </a:pPr>
             <a:r>
               <a:rPr lang="en-US" sz="1450" b="1" dirty="0">
                 <a:solidFill>
@@ -6994,12 +6607,6 @@
               </a:rPr>
               <a:t>трассируемостью</a:t>
             </a:r>
-            <a:pPr algn="l" indent="0" marL="0">
-              <a:lnSpc>
-                <a:spcPct val="133000"/>
-              </a:lnSpc>
-              <a:buNone/>
-            </a:pPr>
             <a:r>
               <a:rPr lang="en-US" sz="1450" dirty="0">
                 <a:solidFill>
@@ -7039,14 +6646,14 @@
       </p:sp>
       <p:pic>
         <p:nvPicPr>
-          <p:cNvPr id="6" name="Image 1" descr="preencoded.png">    </p:cNvPr>
+          <p:cNvPr id="6" name="Image 1" descr="preencoded.png"/>
           <p:cNvPicPr>
             <a:picLocks noChangeAspect="1"/>
           </p:cNvPicPr>
           <p:nvPr/>
         </p:nvPicPr>
         <p:blipFill>
-          <a:blip r:embed="rId2"/>
+          <a:blip r:embed="rId4"/>
           <a:stretch>
             <a:fillRect/>
           </a:stretch>
@@ -7084,7 +6691,7 @@
           </a:bodyPr>
           <a:lstStyle/>
           <a:p>
-            <a:pPr algn="l" indent="0" marL="0">
+            <a:pPr marL="0" indent="0" algn="l">
               <a:lnSpc>
                 <a:spcPct val="133000"/>
               </a:lnSpc>
@@ -7153,7 +6760,7 @@
           <a:bodyPr wrap="none" lIns="0" tIns="0" rIns="0" bIns="0" rtlCol="0" anchor="ctr"/>
           <a:lstStyle/>
           <a:p>
-            <a:pPr algn="ctr" indent="0" marL="0">
+            <a:pPr marL="0" indent="0" algn="ctr">
               <a:lnSpc>
                 <a:spcPct val="100000"/>
               </a:lnSpc>
@@ -7197,7 +6804,7 @@
           </a:bodyPr>
           <a:lstStyle/>
           <a:p>
-            <a:pPr algn="l" indent="0" marL="0">
+            <a:pPr marL="0" indent="0" algn="l">
               <a:lnSpc>
                 <a:spcPct val="104000"/>
               </a:lnSpc>
@@ -7241,7 +6848,7 @@
           </a:bodyPr>
           <a:lstStyle/>
           <a:p>
-            <a:pPr algn="l" indent="0" marL="0">
+            <a:pPr marL="0" indent="0" algn="l">
               <a:lnSpc>
                 <a:spcPct val="133000"/>
               </a:lnSpc>
@@ -7310,7 +6917,7 @@
           <a:bodyPr wrap="none" lIns="0" tIns="0" rIns="0" bIns="0" rtlCol="0" anchor="ctr"/>
           <a:lstStyle/>
           <a:p>
-            <a:pPr algn="ctr" indent="0" marL="0">
+            <a:pPr marL="0" indent="0" algn="ctr">
               <a:lnSpc>
                 <a:spcPct val="100000"/>
               </a:lnSpc>
@@ -7352,7 +6959,7 @@
           <a:bodyPr wrap="none" lIns="0" tIns="0" rIns="0" bIns="0" rtlCol="0" anchor="t"/>
           <a:lstStyle/>
           <a:p>
-            <a:pPr algn="l" indent="0" marL="0">
+            <a:pPr marL="0" indent="0" algn="l">
               <a:lnSpc>
                 <a:spcPct val="104000"/>
               </a:lnSpc>
@@ -7396,7 +7003,7 @@
           </a:bodyPr>
           <a:lstStyle/>
           <a:p>
-            <a:pPr algn="l" indent="0" marL="0">
+            <a:pPr marL="0" indent="0" algn="l">
               <a:lnSpc>
                 <a:spcPct val="133000"/>
               </a:lnSpc>
@@ -7465,7 +7072,7 @@
           <a:bodyPr wrap="none" lIns="0" tIns="0" rIns="0" bIns="0" rtlCol="0" anchor="ctr"/>
           <a:lstStyle/>
           <a:p>
-            <a:pPr algn="ctr" indent="0" marL="0">
+            <a:pPr marL="0" indent="0" algn="ctr">
               <a:lnSpc>
                 <a:spcPct val="100000"/>
               </a:lnSpc>
@@ -7509,7 +7116,7 @@
           </a:bodyPr>
           <a:lstStyle/>
           <a:p>
-            <a:pPr algn="l" indent="0" marL="0">
+            <a:pPr marL="0" indent="0" algn="l">
               <a:lnSpc>
                 <a:spcPct val="104000"/>
               </a:lnSpc>
@@ -7553,7 +7160,7 @@
           </a:bodyPr>
           <a:lstStyle/>
           <a:p>
-            <a:pPr algn="l" indent="0" marL="0">
+            <a:pPr marL="0" indent="0" algn="l">
               <a:lnSpc>
                 <a:spcPct val="133000"/>
               </a:lnSpc>
@@ -7875,4 +7482,299 @@
     </a:ext>
   </a:extLst>
 </a:theme>
+</file>
+
+<file path=ppt/theme/theme2.xml><?xml version="1.0" encoding="utf-8"?>
+<a:theme xmlns:a="http://schemas.openxmlformats.org/drawingml/2006/main" name="Тема Office">
+  <a:themeElements>
+    <a:clrScheme name="Стандартная">
+      <a:dk1>
+        <a:sysClr val="windowText" lastClr="000000"/>
+      </a:dk1>
+      <a:lt1>
+        <a:sysClr val="window" lastClr="FFFFFF"/>
+      </a:lt1>
+      <a:dk2>
+        <a:srgbClr val="44546A"/>
+      </a:dk2>
+      <a:lt2>
+        <a:srgbClr val="E7E6E6"/>
+      </a:lt2>
+      <a:accent1>
+        <a:srgbClr val="4472C4"/>
+      </a:accent1>
+      <a:accent2>
+        <a:srgbClr val="ED7D31"/>
+      </a:accent2>
+      <a:accent3>
+        <a:srgbClr val="A5A5A5"/>
+      </a:accent3>
+      <a:accent4>
+        <a:srgbClr val="FFC000"/>
+      </a:accent4>
+      <a:accent5>
+        <a:srgbClr val="5B9BD5"/>
+      </a:accent5>
+      <a:accent6>
+        <a:srgbClr val="70AD47"/>
+      </a:accent6>
+      <a:hlink>
+        <a:srgbClr val="0563C1"/>
+      </a:hlink>
+      <a:folHlink>
+        <a:srgbClr val="954F72"/>
+      </a:folHlink>
+    </a:clrScheme>
+    <a:fontScheme name="Стандартная">
+      <a:majorFont>
+        <a:latin typeface="Calibri Light" panose="020F0302020204030204"/>
+        <a:ea typeface=""/>
+        <a:cs typeface=""/>
+        <a:font script="Jpan" typeface="游ゴシック Light"/>
+        <a:font script="Hang" typeface="맑은 고딕"/>
+        <a:font script="Hans" typeface="等线 Light"/>
+        <a:font script="Hant" typeface="新細明體"/>
+        <a:font script="Arab" typeface="Times New Roman"/>
+        <a:font script="Hebr" typeface="Times New Roman"/>
+        <a:font script="Thai" typeface="Angsana New"/>
+        <a:font script="Ethi" typeface="Nyala"/>
+        <a:font script="Beng" typeface="Vrinda"/>
+        <a:font script="Gujr" typeface="Shruti"/>
+        <a:font script="Khmr" typeface="MoolBoran"/>
+        <a:font script="Knda" typeface="Tunga"/>
+        <a:font script="Guru" typeface="Raavi"/>
+        <a:font script="Cans" typeface="Euphemia"/>
+        <a:font script="Cher" typeface="Plantagenet Cherokee"/>
+        <a:font script="Yiii" typeface="Microsoft Yi Baiti"/>
+        <a:font script="Tibt" typeface="Microsoft Himalaya"/>
+        <a:font script="Thaa" typeface="MV Boli"/>
+        <a:font script="Deva" typeface="Mangal"/>
+        <a:font script="Telu" typeface="Gautami"/>
+        <a:font script="Taml" typeface="Latha"/>
+        <a:font script="Syrc" typeface="Estrangelo Edessa"/>
+        <a:font script="Orya" typeface="Kalinga"/>
+        <a:font script="Mlym" typeface="Kartika"/>
+        <a:font script="Laoo" typeface="DokChampa"/>
+        <a:font script="Sinh" typeface="Iskoola Pota"/>
+        <a:font script="Mong" typeface="Mongolian Baiti"/>
+        <a:font script="Viet" typeface="Times New Roman"/>
+        <a:font script="Uigh" typeface="Microsoft Uighur"/>
+        <a:font script="Geor" typeface="Sylfaen"/>
+        <a:font script="Armn" typeface="Arial"/>
+        <a:font script="Bugi" typeface="Leelawadee UI"/>
+        <a:font script="Bopo" typeface="Microsoft JhengHei"/>
+        <a:font script="Java" typeface="Javanese Text"/>
+        <a:font script="Lisu" typeface="Segoe UI"/>
+        <a:font script="Mymr" typeface="Myanmar Text"/>
+        <a:font script="Nkoo" typeface="Ebrima"/>
+        <a:font script="Olck" typeface="Nirmala UI"/>
+        <a:font script="Osma" typeface="Ebrima"/>
+        <a:font script="Phag" typeface="Phagspa"/>
+        <a:font script="Syrn" typeface="Estrangelo Edessa"/>
+        <a:font script="Syrj" typeface="Estrangelo Edessa"/>
+        <a:font script="Syre" typeface="Estrangelo Edessa"/>
+        <a:font script="Sora" typeface="Nirmala UI"/>
+        <a:font script="Tale" typeface="Microsoft Tai Le"/>
+        <a:font script="Talu" typeface="Microsoft New Tai Lue"/>
+        <a:font script="Tfng" typeface="Ebrima"/>
+      </a:majorFont>
+      <a:minorFont>
+        <a:latin typeface="Calibri" panose="020F0502020204030204"/>
+        <a:ea typeface=""/>
+        <a:cs typeface=""/>
+        <a:font script="Jpan" typeface="游ゴシック"/>
+        <a:font script="Hang" typeface="맑은 고딕"/>
+        <a:font script="Hans" typeface="等线"/>
+        <a:font script="Hant" typeface="新細明體"/>
+        <a:font script="Arab" typeface="Arial"/>
+        <a:font script="Hebr" typeface="Arial"/>
+        <a:font script="Thai" typeface="Cordia New"/>
+        <a:font script="Ethi" typeface="Nyala"/>
+        <a:font script="Beng" typeface="Vrinda"/>
+        <a:font script="Gujr" typeface="Shruti"/>
+        <a:font script="Khmr" typeface="DaunPenh"/>
+        <a:font script="Knda" typeface="Tunga"/>
+        <a:font script="Guru" typeface="Raavi"/>
+        <a:font script="Cans" typeface="Euphemia"/>
+        <a:font script="Cher" typeface="Plantagenet Cherokee"/>
+        <a:font script="Yiii" typeface="Microsoft Yi Baiti"/>
+        <a:font script="Tibt" typeface="Microsoft Himalaya"/>
+        <a:font script="Thaa" typeface="MV Boli"/>
+        <a:font script="Deva" typeface="Mangal"/>
+        <a:font script="Telu" typeface="Gautami"/>
+        <a:font script="Taml" typeface="Latha"/>
+        <a:font script="Syrc" typeface="Estrangelo Edessa"/>
+        <a:font script="Orya" typeface="Kalinga"/>
+        <a:font script="Mlym" typeface="Kartika"/>
+        <a:font script="Laoo" typeface="DokChampa"/>
+        <a:font script="Sinh" typeface="Iskoola Pota"/>
+        <a:font script="Mong" typeface="Mongolian Baiti"/>
+        <a:font script="Viet" typeface="Arial"/>
+        <a:font script="Uigh" typeface="Microsoft Uighur"/>
+        <a:font script="Geor" typeface="Sylfaen"/>
+        <a:font script="Armn" typeface="Arial"/>
+        <a:font script="Bugi" typeface="Leelawadee UI"/>
+        <a:font script="Bopo" typeface="Microsoft JhengHei"/>
+        <a:font script="Java" typeface="Javanese Text"/>
+        <a:font script="Lisu" typeface="Segoe UI"/>
+        <a:font script="Mymr" typeface="Myanmar Text"/>
+        <a:font script="Nkoo" typeface="Ebrima"/>
+        <a:font script="Olck" typeface="Nirmala UI"/>
+        <a:font script="Osma" typeface="Ebrima"/>
+        <a:font script="Phag" typeface="Phagspa"/>
+        <a:font script="Syrn" typeface="Estrangelo Edessa"/>
+        <a:font script="Syrj" typeface="Estrangelo Edessa"/>
+        <a:font script="Syre" typeface="Estrangelo Edessa"/>
+        <a:font script="Sora" typeface="Nirmala UI"/>
+        <a:font script="Tale" typeface="Microsoft Tai Le"/>
+        <a:font script="Talu" typeface="Microsoft New Tai Lue"/>
+        <a:font script="Tfng" typeface="Ebrima"/>
+      </a:minorFont>
+    </a:fontScheme>
+    <a:fmtScheme name="Стандартная">
+      <a:fillStyleLst>
+        <a:solidFill>
+          <a:schemeClr val="phClr"/>
+        </a:solidFill>
+        <a:gradFill rotWithShape="1">
+          <a:gsLst>
+            <a:gs pos="0">
+              <a:schemeClr val="phClr">
+                <a:lumMod val="110000"/>
+                <a:satMod val="105000"/>
+                <a:tint val="67000"/>
+              </a:schemeClr>
+            </a:gs>
+            <a:gs pos="50000">
+              <a:schemeClr val="phClr">
+                <a:lumMod val="105000"/>
+                <a:satMod val="103000"/>
+                <a:tint val="73000"/>
+              </a:schemeClr>
+            </a:gs>
+            <a:gs pos="100000">
+              <a:schemeClr val="phClr">
+                <a:lumMod val="105000"/>
+                <a:satMod val="109000"/>
+                <a:tint val="81000"/>
+              </a:schemeClr>
+            </a:gs>
+          </a:gsLst>
+          <a:lin ang="5400000" scaled="0"/>
+        </a:gradFill>
+        <a:gradFill rotWithShape="1">
+          <a:gsLst>
+            <a:gs pos="0">
+              <a:schemeClr val="phClr">
+                <a:satMod val="103000"/>
+                <a:lumMod val="102000"/>
+                <a:tint val="94000"/>
+              </a:schemeClr>
+            </a:gs>
+            <a:gs pos="50000">
+              <a:schemeClr val="phClr">
+                <a:satMod val="110000"/>
+                <a:lumMod val="100000"/>
+                <a:shade val="100000"/>
+              </a:schemeClr>
+            </a:gs>
+            <a:gs pos="100000">
+              <a:schemeClr val="phClr">
+                <a:lumMod val="99000"/>
+                <a:satMod val="120000"/>
+                <a:shade val="78000"/>
+              </a:schemeClr>
+            </a:gs>
+          </a:gsLst>
+          <a:lin ang="5400000" scaled="0"/>
+        </a:gradFill>
+      </a:fillStyleLst>
+      <a:lnStyleLst>
+        <a:ln w="6350" cap="flat" cmpd="sng" algn="ctr">
+          <a:solidFill>
+            <a:schemeClr val="phClr"/>
+          </a:solidFill>
+          <a:prstDash val="solid"/>
+          <a:miter lim="800000"/>
+        </a:ln>
+        <a:ln w="12700" cap="flat" cmpd="sng" algn="ctr">
+          <a:solidFill>
+            <a:schemeClr val="phClr"/>
+          </a:solidFill>
+          <a:prstDash val="solid"/>
+          <a:miter lim="800000"/>
+        </a:ln>
+        <a:ln w="19050" cap="flat" cmpd="sng" algn="ctr">
+          <a:solidFill>
+            <a:schemeClr val="phClr"/>
+          </a:solidFill>
+          <a:prstDash val="solid"/>
+          <a:miter lim="800000"/>
+        </a:ln>
+      </a:lnStyleLst>
+      <a:effectStyleLst>
+        <a:effectStyle>
+          <a:effectLst/>
+        </a:effectStyle>
+        <a:effectStyle>
+          <a:effectLst/>
+        </a:effectStyle>
+        <a:effectStyle>
+          <a:effectLst>
+            <a:outerShdw blurRad="57150" dist="19050" dir="5400000" algn="ctr" rotWithShape="0">
+              <a:srgbClr val="000000">
+                <a:alpha val="63000"/>
+              </a:srgbClr>
+            </a:outerShdw>
+          </a:effectLst>
+        </a:effectStyle>
+      </a:effectStyleLst>
+      <a:bgFillStyleLst>
+        <a:solidFill>
+          <a:schemeClr val="phClr"/>
+        </a:solidFill>
+        <a:solidFill>
+          <a:schemeClr val="phClr">
+            <a:tint val="95000"/>
+            <a:satMod val="170000"/>
+          </a:schemeClr>
+        </a:solidFill>
+        <a:gradFill rotWithShape="1">
+          <a:gsLst>
+            <a:gs pos="0">
+              <a:schemeClr val="phClr">
+                <a:tint val="93000"/>
+                <a:satMod val="150000"/>
+                <a:shade val="98000"/>
+                <a:lumMod val="102000"/>
+              </a:schemeClr>
+            </a:gs>
+            <a:gs pos="50000">
+              <a:schemeClr val="phClr">
+                <a:tint val="98000"/>
+                <a:satMod val="130000"/>
+                <a:shade val="90000"/>
+                <a:lumMod val="103000"/>
+              </a:schemeClr>
+            </a:gs>
+            <a:gs pos="100000">
+              <a:schemeClr val="phClr">
+                <a:shade val="63000"/>
+                <a:satMod val="120000"/>
+              </a:schemeClr>
+            </a:gs>
+          </a:gsLst>
+          <a:lin ang="5400000" scaled="0"/>
+        </a:gradFill>
+      </a:bgFillStyleLst>
+    </a:fmtScheme>
+  </a:themeElements>
+  <a:objectDefaults/>
+  <a:extraClrSchemeLst/>
+  <a:extLst>
+    <a:ext uri="{05A4C25C-085E-4340-85A3-A5531E510DB2}">
+      <thm15:themeFamily xmlns:thm15="http://schemas.microsoft.com/office/thememl/2012/main" name="Office Theme" id="{62F939B6-93AF-4DB8-9C6B-D6C7DFDC589F}" vid="{4A3C46E8-61CC-4603-A589-7422A47A8E4A}"/>
+    </a:ext>
+  </a:extLst>
+</a:theme>
 </file>